--- a/slides/pptx/week05.pptx
+++ b/slides/pptx/week05.pptx
@@ -24,9 +24,12 @@
     <p:sldId id="272" r:id="rId18"/>
     <p:sldId id="273" r:id="rId19"/>
     <p:sldId id="274" r:id="rId20"/>
+    <p:sldId id="275" r:id="rId21"/>
+    <p:sldId id="276" r:id="rId22"/>
+    <p:sldId id="277" r:id="rId23"/>
   </p:sldIdLst>
   <p:notesMasterIdLst>
-    <p:notesMasterId r:id="rId21"/>
+    <p:notesMasterId r:id="rId24"/>
   </p:notesMasterIdLst>
   <p:sldSz cx="9144000" cy="5143500"/>
   <p:notesSz cx="5143500" cy="9144000"/>
@@ -608,7 +611,7 @@
           <a:p>
             <a:r>
               <a:rPr lang="en-US" dirty="0"/>
-              <a:t>The step-by-step version of the bullets just covered — walk both panels left to right once. Land on the footnote: fixed_app.py kills the XSS but the CSRF still works, because encoding an output and checking a token are two unrelated fixes. ~4 min.</a:t>
+              <a:t>Parallel to Wk4's parameterize slide and Wk6's verify-signature slide. Same shape as SQLi but on the way OUT: the &lt; is the pivot (like ' in SQL), and escaping makes it an entity the HTML parser treats as text, so the script is shown, not run. Stress: this is an OUTPUT bug — the same stored comment is safe once rendered with autoescaping. And escaping is context-dependent (the sim's point): escape for HTML body != attribute != JS != URL. CSP and HttpOnly reduce blast radius but are not the fix — in this lab escaping kills the payload before CSP would ever fire. ~6 min.</a:t>
             </a:r>
             <a:endParaRPr lang="en-US" dirty="0"/>
           </a:p>
@@ -696,7 +699,7 @@
           <a:p>
             <a:r>
               <a:rPr lang="en-US" dirty="0"/>
-              <a:t>Make it real. Magecart = the keylogging harm from 2 slides ago, at scale, on a Fortune-500 checkout. Note it often enters via a compromised third-party script — which motivates CSP next. ~3 min.</a:t>
+              <a:t>Consolidation slide — leave it up during XSS Golf. All three states at once: blue = text/data, orange = the &lt; that became a live tag. Point at the orange &lt;script&gt; in row 2 ('one character, and it runs'), then the blue &amp;lt; in row 3 ('an entity — the parser shows it, never runs it'). Same story the xss-context sim animates live across the four sinks. ~3 min.</a:t>
             </a:r>
             <a:endParaRPr lang="en-US" dirty="0"/>
           </a:p>
@@ -784,7 +787,7 @@
           <a:p>
             <a:r>
               <a:rPr lang="en-US" dirty="0"/>
-              <a:t>Quick reference for the worksheet — these three are what's graded this week. Clickjacking (CWE-1021) isn't part of this lab; don't cite it here. ~1 min.</a:t>
+              <a:t>Contrast with XSS: CSRF needs no script on the page — it abuses the browser auto-attaching cookies. Example: a hidden form that POSTs a comment. Don't let "SameSite fixes CSRF" stand unqualified — this week's own fixed_app.py sets SameSite=Strict+HttpOnly+Secure and the CSRF PoC still works, because /comments never checks a session or token at all. ~5 min.</a:t>
             </a:r>
             <a:endParaRPr lang="en-US" dirty="0"/>
           </a:p>
@@ -872,7 +875,7 @@
           <a:p>
             <a:r>
               <a:rPr lang="en-US" dirty="0"/>
-              <a:t>The payoff. #1: encode for the OUTPUT CONTEXT (the bug is on output). Modern frameworks auto-escape — the danger is when devs opt out (innerHTML). Be accurate about CSP here: this lab's escaping already neutralizes every payload before CSP would ever matter, so students will NOT see a CSP violation fire in the console today — it's set as a header, its blocking behavior is asserted, not demonstrated, in this sandbox. ~6 min.</a:t>
+              <a:t>The step-by-step version of the bullets just covered — walk both panels left to right once. Land on the footnote: fixed_app.py kills the XSS but the CSRF still works, because encoding an output and checking a token are two unrelated fixes. ~4 min.</a:t>
             </a:r>
             <a:endParaRPr lang="en-US" dirty="0"/>
           </a:p>
@@ -960,7 +963,7 @@
           <a:p>
             <a:r>
               <a:rPr lang="en-US" dirty="0"/>
-              <a:t>Explain before lab: this app is local, not Juice Shop; solo, not a bonus-round competition. The real graded turn is running fixed_app.py and showing escaping stops the golf payloads while CSRF still gets through — that contrast is the point. ~3 min.</a:t>
+              <a:t>Make it real. Magecart = the keylogging harm from 2 slides ago, at scale, on a Fortune-500 checkout. Note it often enters via a compromised third-party script — which motivates CSP next. ~3 min.</a:t>
             </a:r>
             <a:endParaRPr lang="en-US" dirty="0"/>
           </a:p>
@@ -1048,7 +1051,7 @@
           <a:p>
             <a:r>
               <a:rPr lang="en-US" dirty="0"/>
-              <a:t>Logistics. Step 4 is the one people get backwards: the defended app still falls to CSRF, on purpose — the lesson is that SameSite protects cookie *attachment*, not request *authorization*. Steps 3-4 (defend) are graded. Q6 of the quiz asks for their own scoring payload + the sink it hit.</a:t>
+              <a:t>Quick reference for the worksheet — these three are what's graded this week. Clickjacking (CWE-1021) isn't part of this lab; don't cite it here. ~1 min.</a:t>
             </a:r>
             <a:endParaRPr lang="en-US" dirty="0"/>
           </a:p>
@@ -1136,7 +1139,7 @@
           <a:p>
             <a:r>
               <a:rPr lang="en-US" dirty="0"/>
-              <a:t>Logistics. Step 4 is the one people get backwards: the defended app still falls to CSRF, on purpose — the lesson is that SameSite protects cookie *attachment*, not request *authorization*. Steps 3-4 (defend) are graded. Q6 of the quiz asks for their own scoring payload + the sink it hit.</a:t>
+              <a:t>The payoff. #1: encode for the OUTPUT CONTEXT (the bug is on output). Modern frameworks auto-escape — the danger is when devs opt out (innerHTML). Be accurate about CSP here: this lab's escaping already neutralizes every payload before CSP would ever matter, so students will NOT see a CSP violation fire in the console today — it's set as a header, its blocking behavior is asserted, not demonstrated, in this sandbox. ~6 min.</a:t>
             </a:r>
             <a:endParaRPr lang="en-US" dirty="0"/>
           </a:p>
@@ -1224,7 +1227,7 @@
           <a:p>
             <a:r>
               <a:rPr lang="en-US" dirty="0"/>
-              <a:t>Before/after + the reasoning note — the CSRF note is graded on getting the SameSite-doesn't-equal-authorization distinction right, not on claiming the defense worked. Remind the AI-resilient tasks count.</a:t>
+              <a:t>Explain before lab: this app is local, not Juice Shop; solo, not a bonus-round competition. The real graded turn is running fixed_app.py and showing escaping stops the golf payloads while CSRF still gets through — that contrast is the point. ~3 min.</a:t>
             </a:r>
             <a:endParaRPr lang="en-US" dirty="0"/>
           </a:p>
@@ -1312,7 +1315,7 @@
           <a:p>
             <a:r>
               <a:rPr lang="en-US" dirty="0"/>
-              <a:t>Recap. Cold-call: "where is the XSS bug — input or output?" (output rendering). Second cold-call: "if SameSite=Strict is set, why did CSRF still work today?" (the endpoint never checked who was asking). ~2 min.</a:t>
+              <a:t>Logistics. Step 4 is the one people get backwards: the defended app still falls to CSRF, on purpose — the lesson is that SameSite protects cookie *attachment*, not request *authorization*. Steps 3-4 (defend) are graded. The weekly quiz no longer asks for their scoring payload/sink/flag (dropped — quiz runs before the lab) — that's required in the worksheet instead.</a:t>
             </a:r>
             <a:endParaRPr lang="en-US" dirty="0"/>
           </a:p>
@@ -1400,7 +1403,7 @@
           <a:p>
             <a:r>
               <a:rPr lang="en-US" dirty="0"/>
-              <a:t>Cliffhanger: "Next week — change one number in a URL and read someone else's data; forge a token and become admin." Remind Juice Shop ready.</a:t>
+              <a:t>Logistics. Step 4 is the one people get backwards: the defended app still falls to CSRF, on purpose — the lesson is that SameSite protects cookie *attachment*, not request *authorization*. Steps 3-4 (defend) are graded. The weekly quiz no longer asks for their scoring payload/sink/flag (dropped — quiz runs before the lab) — that's required in the worksheet instead.</a:t>
             </a:r>
             <a:endParaRPr lang="en-US" dirty="0"/>
           </a:p>
@@ -1530,6 +1533,270 @@
 </p:notes>
 </file>
 
+<file path=ppt/notesSlides/notesSlide20.xml><?xml version="1.0" encoding="utf-8"?>
+<p:notes xmlns:a="http://schemas.openxmlformats.org/drawingml/2006/main" xmlns:r="http://schemas.openxmlformats.org/officeDocument/2006/relationships" xmlns:p="http://schemas.openxmlformats.org/presentationml/2006/main">
+  <p:cSld>
+    <p:spTree>
+      <p:nvGrpSpPr>
+        <p:cNvPr id="1" name=""/>
+        <p:cNvGrpSpPr/>
+        <p:nvPr/>
+      </p:nvGrpSpPr>
+      <p:grpSpPr>
+        <a:xfrm>
+          <a:off x="0" y="0"/>
+          <a:ext cx="0" cy="0"/>
+          <a:chOff x="0" y="0"/>
+          <a:chExt cx="0" cy="0"/>
+        </a:xfrm>
+      </p:grpSpPr>
+      <p:sp>
+        <p:nvSpPr>
+          <p:cNvPr id="2" name="Slide Image Placeholder 1"/>
+          <p:cNvSpPr>
+            <a:spLocks noGrp="1" noRot="1" noChangeAspect="1"/>
+          </p:cNvSpPr>
+          <p:nvPr>
+            <p:ph type="sldImg"/>
+          </p:nvPr>
+        </p:nvSpPr>
+        <p:spPr/>
+      </p:sp>
+      <p:sp>
+        <p:nvSpPr>
+          <p:cNvPr id="3" name="Notes Placeholder 2"/>
+          <p:cNvSpPr>
+            <a:spLocks noGrp="1"/>
+          </p:cNvSpPr>
+          <p:nvPr>
+            <p:ph type="body" idx="1"/>
+          </p:nvPr>
+        </p:nvSpPr>
+        <p:spPr/>
+        <p:txBody>
+          <a:bodyPr/>
+          <a:lstStyle/>
+          <a:p>
+            <a:r>
+              <a:rPr lang="en-US" dirty="0"/>
+              <a:t>Before/after + the reasoning note — the CSRF note is graded on getting the SameSite-doesn't-equal-authorization distinction right, not on claiming the defense worked. Remind the AI-resilient tasks count.</a:t>
+            </a:r>
+            <a:endParaRPr lang="en-US" dirty="0"/>
+          </a:p>
+        </p:txBody>
+      </p:sp>
+      <p:sp>
+        <p:nvSpPr>
+          <p:cNvPr id="4" name="Slide Number Placeholder 3"/>
+          <p:cNvSpPr>
+            <a:spLocks noGrp="1"/>
+          </p:cNvSpPr>
+          <p:nvPr>
+            <p:ph type="sldNum" sz="quarter" idx="10"/>
+          </p:nvPr>
+        </p:nvSpPr>
+        <p:spPr/>
+        <p:txBody>
+          <a:bodyPr/>
+          <a:lstStyle/>
+          <a:p>
+            <a:fld id="{F7021451-1387-4CA6-816F-3879F97B5CBC}" type="slidenum">
+              <a:rPr lang="en-US"/>
+              <a:t>20</a:t>
+            </a:fld>
+            <a:endParaRPr lang="en-US"/>
+          </a:p>
+        </p:txBody>
+      </p:sp>
+    </p:spTree>
+    <p:extLst>
+      <p:ext uri="{BB962C8B-B14F-4D97-AF65-F5344CB8AC3E}">
+        <p14:creationId xmlns:p14="http://schemas.microsoft.com/office/powerpoint/2010/main" val="1024086991"/>
+      </p:ext>
+    </p:extLst>
+  </p:cSld>
+  <p:clrMapOvr>
+    <a:masterClrMapping/>
+  </p:clrMapOvr>
+</p:notes>
+</file>
+
+<file path=ppt/notesSlides/notesSlide21.xml><?xml version="1.0" encoding="utf-8"?>
+<p:notes xmlns:a="http://schemas.openxmlformats.org/drawingml/2006/main" xmlns:r="http://schemas.openxmlformats.org/officeDocument/2006/relationships" xmlns:p="http://schemas.openxmlformats.org/presentationml/2006/main">
+  <p:cSld>
+    <p:spTree>
+      <p:nvGrpSpPr>
+        <p:cNvPr id="1" name=""/>
+        <p:cNvGrpSpPr/>
+        <p:nvPr/>
+      </p:nvGrpSpPr>
+      <p:grpSpPr>
+        <a:xfrm>
+          <a:off x="0" y="0"/>
+          <a:ext cx="0" cy="0"/>
+          <a:chOff x="0" y="0"/>
+          <a:chExt cx="0" cy="0"/>
+        </a:xfrm>
+      </p:grpSpPr>
+      <p:sp>
+        <p:nvSpPr>
+          <p:cNvPr id="2" name="Slide Image Placeholder 1"/>
+          <p:cNvSpPr>
+            <a:spLocks noGrp="1" noRot="1" noChangeAspect="1"/>
+          </p:cNvSpPr>
+          <p:nvPr>
+            <p:ph type="sldImg"/>
+          </p:nvPr>
+        </p:nvSpPr>
+        <p:spPr/>
+      </p:sp>
+      <p:sp>
+        <p:nvSpPr>
+          <p:cNvPr id="3" name="Notes Placeholder 2"/>
+          <p:cNvSpPr>
+            <a:spLocks noGrp="1"/>
+          </p:cNvSpPr>
+          <p:nvPr>
+            <p:ph type="body" idx="1"/>
+          </p:nvPr>
+        </p:nvSpPr>
+        <p:spPr/>
+        <p:txBody>
+          <a:bodyPr/>
+          <a:lstStyle/>
+          <a:p>
+            <a:r>
+              <a:rPr lang="en-US" dirty="0"/>
+              <a:t>Recap. Cold-call: "where is the XSS bug — input or output?" (output rendering). Second cold-call: "if SameSite=Strict is set, why did CSRF still work today?" (the endpoint never checked who was asking). ~2 min.</a:t>
+            </a:r>
+            <a:endParaRPr lang="en-US" dirty="0"/>
+          </a:p>
+        </p:txBody>
+      </p:sp>
+      <p:sp>
+        <p:nvSpPr>
+          <p:cNvPr id="4" name="Slide Number Placeholder 3"/>
+          <p:cNvSpPr>
+            <a:spLocks noGrp="1"/>
+          </p:cNvSpPr>
+          <p:nvPr>
+            <p:ph type="sldNum" sz="quarter" idx="10"/>
+          </p:nvPr>
+        </p:nvSpPr>
+        <p:spPr/>
+        <p:txBody>
+          <a:bodyPr/>
+          <a:lstStyle/>
+          <a:p>
+            <a:fld id="{F7021451-1387-4CA6-816F-3879F97B5CBC}" type="slidenum">
+              <a:rPr lang="en-US"/>
+              <a:t>21</a:t>
+            </a:fld>
+            <a:endParaRPr lang="en-US"/>
+          </a:p>
+        </p:txBody>
+      </p:sp>
+    </p:spTree>
+    <p:extLst>
+      <p:ext uri="{BB962C8B-B14F-4D97-AF65-F5344CB8AC3E}">
+        <p14:creationId xmlns:p14="http://schemas.microsoft.com/office/powerpoint/2010/main" val="1024086991"/>
+      </p:ext>
+    </p:extLst>
+  </p:cSld>
+  <p:clrMapOvr>
+    <a:masterClrMapping/>
+  </p:clrMapOvr>
+</p:notes>
+</file>
+
+<file path=ppt/notesSlides/notesSlide22.xml><?xml version="1.0" encoding="utf-8"?>
+<p:notes xmlns:a="http://schemas.openxmlformats.org/drawingml/2006/main" xmlns:r="http://schemas.openxmlformats.org/officeDocument/2006/relationships" xmlns:p="http://schemas.openxmlformats.org/presentationml/2006/main">
+  <p:cSld>
+    <p:spTree>
+      <p:nvGrpSpPr>
+        <p:cNvPr id="1" name=""/>
+        <p:cNvGrpSpPr/>
+        <p:nvPr/>
+      </p:nvGrpSpPr>
+      <p:grpSpPr>
+        <a:xfrm>
+          <a:off x="0" y="0"/>
+          <a:ext cx="0" cy="0"/>
+          <a:chOff x="0" y="0"/>
+          <a:chExt cx="0" cy="0"/>
+        </a:xfrm>
+      </p:grpSpPr>
+      <p:sp>
+        <p:nvSpPr>
+          <p:cNvPr id="2" name="Slide Image Placeholder 1"/>
+          <p:cNvSpPr>
+            <a:spLocks noGrp="1" noRot="1" noChangeAspect="1"/>
+          </p:cNvSpPr>
+          <p:nvPr>
+            <p:ph type="sldImg"/>
+          </p:nvPr>
+        </p:nvSpPr>
+        <p:spPr/>
+      </p:sp>
+      <p:sp>
+        <p:nvSpPr>
+          <p:cNvPr id="3" name="Notes Placeholder 2"/>
+          <p:cNvSpPr>
+            <a:spLocks noGrp="1"/>
+          </p:cNvSpPr>
+          <p:nvPr>
+            <p:ph type="body" idx="1"/>
+          </p:nvPr>
+        </p:nvSpPr>
+        <p:spPr/>
+        <p:txBody>
+          <a:bodyPr/>
+          <a:lstStyle/>
+          <a:p>
+            <a:r>
+              <a:rPr lang="en-US" dirty="0"/>
+              <a:t>Cliffhanger: "Next week — change one number in a URL and read someone else's data; forge a token and become admin." Remind Juice Shop ready.</a:t>
+            </a:r>
+            <a:endParaRPr lang="en-US" dirty="0"/>
+          </a:p>
+        </p:txBody>
+      </p:sp>
+      <p:sp>
+        <p:nvSpPr>
+          <p:cNvPr id="4" name="Slide Number Placeholder 3"/>
+          <p:cNvSpPr>
+            <a:spLocks noGrp="1"/>
+          </p:cNvSpPr>
+          <p:nvPr>
+            <p:ph type="sldNum" sz="quarter" idx="10"/>
+          </p:nvPr>
+        </p:nvSpPr>
+        <p:spPr/>
+        <p:txBody>
+          <a:bodyPr/>
+          <a:lstStyle/>
+          <a:p>
+            <a:fld id="{F7021451-1387-4CA6-816F-3879F97B5CBC}" type="slidenum">
+              <a:rPr lang="en-US"/>
+              <a:t>22</a:t>
+            </a:fld>
+            <a:endParaRPr lang="en-US"/>
+          </a:p>
+        </p:txBody>
+      </p:sp>
+    </p:spTree>
+    <p:extLst>
+      <p:ext uri="{BB962C8B-B14F-4D97-AF65-F5344CB8AC3E}">
+        <p14:creationId xmlns:p14="http://schemas.microsoft.com/office/powerpoint/2010/main" val="1024086991"/>
+      </p:ext>
+    </p:extLst>
+  </p:cSld>
+  <p:clrMapOvr>
+    <a:masterClrMapping/>
+  </p:clrMapOvr>
+</p:notes>
+</file>
+
 <file path=ppt/notesSlides/notesSlide3.xml><?xml version="1.0" encoding="utf-8"?>
 <p:notes xmlns:a="http://schemas.openxmlformats.org/drawingml/2006/main" xmlns:r="http://schemas.openxmlformats.org/officeDocument/2006/relationships" xmlns:p="http://schemas.openxmlformats.org/presentationml/2006/main">
   <p:cSld>
@@ -2104,7 +2371,7 @@
           <a:p>
             <a:r>
               <a:rPr lang="en-US" dirty="0"/>
-              <a:t>Contrast with XSS: CSRF needs no script on the page — it abuses the browser auto-attaching cookies. Example: a hidden form that POSTs a comment. Don't let "SameSite fixes CSRF" stand unqualified — this week's own fixed_app.py sets SameSite=Strict+HttpOnly+Secure and the CSRF PoC still works, because /comments never checks a session or token at all. ~5 min.</a:t>
+              <a:t>Parallel to Wk4's parameterize slide and Wk6's verify-signature slide. Same shape as SQLi but on the way OUT: the &lt; is the pivot (like ' in SQL), and escaping makes it an entity the HTML parser treats as text, so the script is shown, not run. Stress: this is an OUTPUT bug — the same stored comment is safe once rendered with autoescaping. And escaping is context-dependent (the sim's point): escape for HTML body != attribute != JS != URL. CSP and HttpOnly reduce blast radius but are not the fix — in this lab escaping kills the payload before CSP would ever fire. ~6 min.</a:t>
             </a:r>
             <a:endParaRPr lang="en-US" dirty="0"/>
           </a:p>
@@ -2737,7 +3004,7 @@
                 <a:ea typeface="Arial" pitchFamily="34" charset="-122"/>
                 <a:cs typeface="Arial" pitchFamily="34" charset="-120"/>
               </a:rPr>
-              <a:t>Same cookie, opposite directions</a:t>
+              <a:t>The fix: encode on output — data renders as text (cont.)</a:t>
             </a:r>
             <a:endParaRPr lang="en-US" sz="2600" dirty="0"/>
           </a:p>
@@ -2745,14 +3012,43 @@
       </p:sp>
       <p:sp>
         <p:nvSpPr>
-          <p:cNvPr id="5" name="Text 2"/>
-          <p:cNvSpPr/>
-          <p:nvPr/>
-        </p:nvSpPr>
-        <p:spPr>
-          <a:xfrm>
-            <a:off x="548640" y="1325880"/>
-            <a:ext cx="8046720" cy="2468880"/>
+          <p:cNvPr id="5" name="Shape 2"/>
+          <p:cNvSpPr/>
+          <p:nvPr/>
+        </p:nvSpPr>
+        <p:spPr>
+          <a:xfrm>
+            <a:off x="457200" y="1325880"/>
+            <a:ext cx="8229600" cy="786384"/>
+          </a:xfrm>
+          <a:prstGeom prst="roundRect">
+            <a:avLst>
+              <a:gd name="adj" fmla="val 9302"/>
+            </a:avLst>
+          </a:prstGeom>
+          <a:solidFill>
+            <a:srgbClr val="F1F5F9"/>
+          </a:solidFill>
+          <a:ln/>
+          <a:effectLst>
+            <a:outerShdw sx="100000" sy="100000" kx="0" ky="0" algn="bl" rotWithShape="0" blurRad="76200" dist="25400" dir="5400000">
+              <a:srgbClr val="000000">
+                <a:alpha val="12000"/>
+              </a:srgbClr>
+            </a:outerShdw>
+          </a:effectLst>
+        </p:spPr>
+      </p:sp>
+      <p:sp>
+        <p:nvSpPr>
+          <p:cNvPr id="6" name="Text 3"/>
+          <p:cNvSpPr/>
+          <p:nvPr/>
+        </p:nvSpPr>
+        <p:spPr>
+          <a:xfrm>
+            <a:off x="731520" y="1435608"/>
+            <a:ext cx="7680960" cy="566928"/>
           </a:xfrm>
           <a:prstGeom prst="rect">
             <a:avLst/>
@@ -2766,8 +3062,12 @@
           </a:bodyPr>
           <a:lstStyle/>
           <a:p>
-            <a:pPr indent="0" marL="0">
-              <a:buNone/>
+            <a:pPr marL="342900" indent="-342900">
+              <a:spcAft>
+                <a:spcPts val="600"/>
+              </a:spcAft>
+              <a:buSzPct val="100000"/>
+              <a:buChar char="•"/>
             </a:pPr>
             <a:r>
               <a:rPr lang="en-US" sz="1400" dirty="0">
@@ -2778,7 +3078,7 @@
                 <a:ea typeface="Calibri" pitchFamily="34" charset="-122"/>
                 <a:cs typeface="Calibri" pitchFamily="34" charset="-120"/>
               </a:rPr>
-              <a:t>See diagram: Two stacked panels comparing stored XSS with CSRF, using the same attacker/server/victim actors. Stored XSS: attacker posts a script, the victim loads it, it runs in the victim's origin and steals the cookie (no HttpOnly) — fixed by output encoding, not SameSite, since the payload is already same-origin. CSRF: the victim visits the attacker's page, which auto-submits a form; the browser attaches the cookie itself and the server can't tell the victim never meant to send it — fixed by SameSite plus a CSRF token the server actually checks, not HttpOnly, since no script ever reads the cookie. (web only)</a:t>
+              <a:t>Encode for the context (HTML / attribute / JS / URL); CSP + HttpOnly are extra layers</a:t>
             </a:r>
             <a:endParaRPr lang="en-US" sz="1400" dirty="0"/>
           </a:p>
@@ -2786,7 +3086,7 @@
       </p:sp>
       <p:sp>
         <p:nvSpPr>
-          <p:cNvPr id="6" name="Text 3"/>
+          <p:cNvPr id="7" name="Text 4"/>
           <p:cNvSpPr/>
           <p:nvPr/>
         </p:nvSpPr>
@@ -2825,7 +3125,7 @@
       </p:sp>
       <p:pic>
         <p:nvPicPr>
-          <p:cNvPr id="7" name="Image 1" descr="/Users/pop7/Library/CloudStorage/OneDrive-MonsterConnectCo.,Ltd/Lecture/KOSEN69 - software-security/slides/pptx/assets/logo-small.png">    </p:cNvPr>
+          <p:cNvPr id="8" name="Image 1" descr="/Users/pop7/Library/CloudStorage/OneDrive-MonsterConnectCo.,Ltd/Lecture/KOSEN69 - software-security/slides/pptx/assets/logo-small.png">    </p:cNvPr>
           <p:cNvPicPr>
             <a:picLocks noChangeAspect="1"/>
           </p:cNvPicPr>
@@ -2963,7 +3263,7 @@
                 <a:ea typeface="Arial" pitchFamily="34" charset="-122"/>
                 <a:cs typeface="Arial" pitchFamily="34" charset="-120"/>
               </a:rPr>
-              <a:t>Real-world: British Airways (2018)</a:t>
+              <a:t>XSS in one picture</a:t>
             </a:r>
             <a:endParaRPr lang="en-US" sz="2600" dirty="0"/>
           </a:p>
@@ -2971,43 +3271,14 @@
       </p:sp>
       <p:sp>
         <p:nvSpPr>
-          <p:cNvPr id="5" name="Shape 2"/>
-          <p:cNvSpPr/>
-          <p:nvPr/>
-        </p:nvSpPr>
-        <p:spPr>
-          <a:xfrm>
-            <a:off x="457200" y="1325880"/>
-            <a:ext cx="8229600" cy="1408176"/>
-          </a:xfrm>
-          <a:prstGeom prst="roundRect">
-            <a:avLst>
-              <a:gd name="adj" fmla="val 5195"/>
-            </a:avLst>
-          </a:prstGeom>
-          <a:solidFill>
-            <a:srgbClr val="F1F5F9"/>
-          </a:solidFill>
-          <a:ln/>
-          <a:effectLst>
-            <a:outerShdw sx="100000" sy="100000" kx="0" ky="0" algn="bl" rotWithShape="0" blurRad="76200" dist="25400" dir="5400000">
-              <a:srgbClr val="000000">
-                <a:alpha val="12000"/>
-              </a:srgbClr>
-            </a:outerShdw>
-          </a:effectLst>
-        </p:spPr>
-      </p:sp>
-      <p:sp>
-        <p:nvSpPr>
-          <p:cNvPr id="6" name="Text 3"/>
-          <p:cNvSpPr/>
-          <p:nvPr/>
-        </p:nvSpPr>
-        <p:spPr>
-          <a:xfrm>
-            <a:off x="731520" y="1435608"/>
-            <a:ext cx="7680960" cy="1188720"/>
+          <p:cNvPr id="5" name="Text 2"/>
+          <p:cNvSpPr/>
+          <p:nvPr/>
+        </p:nvSpPr>
+        <p:spPr>
+          <a:xfrm>
+            <a:off x="548640" y="1325880"/>
+            <a:ext cx="8046720" cy="1645920"/>
           </a:xfrm>
           <a:prstGeom prst="rect">
             <a:avLst/>
@@ -3021,12 +3292,8 @@
           </a:bodyPr>
           <a:lstStyle/>
           <a:p>
-            <a:pPr marL="342900" indent="-342900">
-              <a:spcAft>
-                <a:spcPts val="600"/>
-              </a:spcAft>
-              <a:buSzPct val="100000"/>
-              <a:buChar char="•"/>
+            <a:pPr indent="0" marL="0">
+              <a:buNone/>
             </a:pPr>
             <a:r>
               <a:rPr lang="en-US" sz="1400" dirty="0">
@@ -3037,150 +3304,45 @@
                 <a:ea typeface="Calibri" pitchFamily="34" charset="-122"/>
                 <a:cs typeface="Calibri" pitchFamily="34" charset="-120"/>
               </a:rPr>
-              <a:t>Attackers injected malicious JS (Magecart) into BA's site/app</a:t>
+              <a:t>See diagram: Three versions of the /hello page: normal input you renders as text; injected &lt;script&gt;alert(1)&lt;/script&gt; makes the browser parse a real script tag and run it in the site's origin; and the escaped version &amp;lt;script&amp;gt;... is read as an HTML entity so the browser shows the characters and runs nothing. XSS is an output bug — encode for the context so &lt; can never start a tag. (web only)</a:t>
             </a:r>
             <a:endParaRPr lang="en-US" sz="1400" dirty="0"/>
           </a:p>
-          <a:p>
-            <a:pPr marL="342900" indent="-342900">
-              <a:spcAft>
-                <a:spcPts val="600"/>
-              </a:spcAft>
-              <a:buSzPct val="100000"/>
-              <a:buChar char="•"/>
-            </a:pPr>
-            <a:r>
-              <a:rPr lang="en-US" sz="1400" dirty="0">
-                <a:solidFill>
-                  <a:srgbClr val="1F2937"/>
+        </p:txBody>
+      </p:sp>
+      <p:sp>
+        <p:nvSpPr>
+          <p:cNvPr id="6" name="Text 3"/>
+          <p:cNvSpPr/>
+          <p:nvPr/>
+        </p:nvSpPr>
+        <p:spPr>
+          <a:xfrm>
+            <a:off x="457200" y="4800600"/>
+            <a:ext cx="6949440" cy="274320"/>
+          </a:xfrm>
+          <a:prstGeom prst="rect">
+            <a:avLst/>
+          </a:prstGeom>
+          <a:noFill/>
+          <a:ln/>
+        </p:spPr>
+        <p:txBody>
+          <a:bodyPr wrap="square" lIns="0" tIns="0" rIns="0" bIns="0" rtlCol="0" anchor="ctr"/>
+          <a:lstStyle/>
+          <a:p>
+            <a:pPr indent="0" marL="0">
+              <a:buNone/>
+            </a:pPr>
+            <a:r>
+              <a:rPr lang="en-US" sz="900" dirty="0">
+                <a:solidFill>
+                  <a:srgbClr val="64748B"/>
                 </a:solidFill>
                 <a:latin typeface="Calibri" pitchFamily="34" charset="0"/>
                 <a:ea typeface="Calibri" pitchFamily="34" charset="-122"/>
                 <a:cs typeface="Calibri" pitchFamily="34" charset="-120"/>
               </a:rPr>
-              <a:t>Script skimmed credit-card details as users typed</a:t>
-            </a:r>
-            <a:endParaRPr lang="en-US" sz="1400" dirty="0"/>
-          </a:p>
-          <a:p>
-            <a:pPr marL="342900" indent="-342900">
-              <a:spcAft>
-                <a:spcPts val="600"/>
-              </a:spcAft>
-              <a:buSzPct val="100000"/>
-              <a:buChar char="•"/>
-            </a:pPr>
-            <a:r>
-              <a:rPr lang="en-US" sz="1400" dirty="0">
-                <a:solidFill>
-                  <a:srgbClr val="1F2937"/>
-                </a:solidFill>
-                <a:latin typeface="Calibri" pitchFamily="34" charset="0"/>
-                <a:ea typeface="Calibri" pitchFamily="34" charset="-122"/>
-                <a:cs typeface="Calibri" pitchFamily="34" charset="-120"/>
-              </a:rPr>
-              <a:t>~380k payment records skimmed; ICO proposed a £183M fine, finalized at £20M (2020, ~89% reduction)</a:t>
-            </a:r>
-            <a:endParaRPr lang="en-US" sz="1400" dirty="0"/>
-          </a:p>
-        </p:txBody>
-      </p:sp>
-      <p:sp>
-        <p:nvSpPr>
-          <p:cNvPr id="7" name="Shape 4"/>
-          <p:cNvSpPr/>
-          <p:nvPr/>
-        </p:nvSpPr>
-        <p:spPr>
-          <a:xfrm>
-            <a:off x="457200" y="2898648"/>
-            <a:ext cx="8229600" cy="822960"/>
-          </a:xfrm>
-          <a:prstGeom prst="roundRect">
-            <a:avLst>
-              <a:gd name="adj" fmla="val 8889"/>
-            </a:avLst>
-          </a:prstGeom>
-          <a:solidFill>
-            <a:srgbClr val="E8EDF3"/>
-          </a:solidFill>
-          <a:ln/>
-        </p:spPr>
-      </p:sp>
-      <p:sp>
-        <p:nvSpPr>
-          <p:cNvPr id="8" name="Text 5"/>
-          <p:cNvSpPr/>
-          <p:nvPr/>
-        </p:nvSpPr>
-        <p:spPr>
-          <a:xfrm>
-            <a:off x="731520" y="2898648"/>
-            <a:ext cx="7680960" cy="822960"/>
-          </a:xfrm>
-          <a:prstGeom prst="rect">
-            <a:avLst/>
-          </a:prstGeom>
-          <a:noFill/>
-          <a:ln/>
-        </p:spPr>
-        <p:txBody>
-          <a:bodyPr wrap="square" lIns="0" tIns="0" rIns="0" bIns="0" rtlCol="0" anchor="ctr">
-            <a:normAutofit/>
-          </a:bodyPr>
-          <a:lstStyle/>
-          <a:p>
-            <a:pPr indent="0" marL="0">
-              <a:buNone/>
-            </a:pPr>
-            <a:r>
-              <a:rPr lang="en-US" sz="1400" i="1" dirty="0">
-                <a:solidFill>
-                  <a:srgbClr val="E35205"/>
-                </a:solidFill>
-                <a:latin typeface="Calibri" pitchFamily="34" charset="0"/>
-                <a:ea typeface="Calibri" pitchFamily="34" charset="-122"/>
-                <a:cs typeface="Calibri" pitchFamily="34" charset="-120"/>
-              </a:rPr>
-              <a:t>Client-side injection = real money + real fines.</a:t>
-            </a:r>
-            <a:endParaRPr lang="en-US" sz="1400" dirty="0"/>
-          </a:p>
-        </p:txBody>
-      </p:sp>
-      <p:sp>
-        <p:nvSpPr>
-          <p:cNvPr id="9" name="Text 6"/>
-          <p:cNvSpPr/>
-          <p:nvPr/>
-        </p:nvSpPr>
-        <p:spPr>
-          <a:xfrm>
-            <a:off x="457200" y="4800600"/>
-            <a:ext cx="6949440" cy="274320"/>
-          </a:xfrm>
-          <a:prstGeom prst="rect">
-            <a:avLst/>
-          </a:prstGeom>
-          <a:noFill/>
-          <a:ln/>
-        </p:spPr>
-        <p:txBody>
-          <a:bodyPr wrap="square" lIns="0" tIns="0" rIns="0" bIns="0" rtlCol="0" anchor="ctr"/>
-          <a:lstStyle/>
-          <a:p>
-            <a:pPr indent="0" marL="0">
-              <a:buNone/>
-            </a:pPr>
-            <a:r>
-              <a:rPr lang="en-US" sz="900" dirty="0">
-                <a:solidFill>
-                  <a:srgbClr val="64748B"/>
-                </a:solidFill>
-                <a:latin typeface="Calibri" pitchFamily="34" charset="0"/>
-                <a:ea typeface="Calibri" pitchFamily="34" charset="-122"/>
-                <a:cs typeface="Calibri" pitchFamily="34" charset="-120"/>
-              </a:rPr>
               <a:t>Software Security · Week 5</a:t>
             </a:r>
             <a:endParaRPr lang="en-US" sz="900" dirty="0"/>
@@ -3189,7 +3351,7 @@
       </p:sp>
       <p:pic>
         <p:nvPicPr>
-          <p:cNvPr id="10" name="Image 1" descr="/Users/pop7/Library/CloudStorage/OneDrive-MonsterConnectCo.,Ltd/Lecture/KOSEN69 - software-security/slides/pptx/assets/logo-small.png">    </p:cNvPr>
+          <p:cNvPr id="7" name="Image 1" descr="/Users/pop7/Library/CloudStorage/OneDrive-MonsterConnectCo.,Ltd/Lecture/KOSEN69 - software-security/slides/pptx/assets/logo-small.png">    </p:cNvPr>
           <p:cNvPicPr>
             <a:picLocks noChangeAspect="1"/>
           </p:cNvPicPr>
@@ -3327,7 +3489,7 @@
                 <a:ea typeface="Arial" pitchFamily="34" charset="-122"/>
                 <a:cs typeface="Arial" pitchFamily="34" charset="-120"/>
               </a:rPr>
-              <a:t>CWE mapping</a:t>
+              <a:t>CSRF — riding the user's session</a:t>
             </a:r>
             <a:endParaRPr lang="en-US" sz="2600" dirty="0"/>
           </a:p>
@@ -3342,11 +3504,11 @@
         <p:spPr>
           <a:xfrm>
             <a:off x="457200" y="1325880"/>
-            <a:ext cx="8229600" cy="1207008"/>
+            <a:ext cx="8229600" cy="1810512"/>
           </a:xfrm>
           <a:prstGeom prst="roundRect">
             <a:avLst>
-              <a:gd name="adj" fmla="val 6061"/>
+              <a:gd name="adj" fmla="val 4040"/>
             </a:avLst>
           </a:prstGeom>
           <a:solidFill>
@@ -3371,7 +3533,7 @@
         <p:spPr>
           <a:xfrm>
             <a:off x="731520" y="1435608"/>
-            <a:ext cx="7680960" cy="987552"/>
+            <a:ext cx="7680960" cy="1591056"/>
           </a:xfrm>
           <a:prstGeom prst="rect">
             <a:avLst/>
@@ -3401,7 +3563,7 @@
                 <a:ea typeface="Calibri" pitchFamily="34" charset="-122"/>
                 <a:cs typeface="Calibri" pitchFamily="34" charset="-120"/>
               </a:rPr>
-              <a:t>CWE-79 — Cross-site scripting</a:t>
+              <a:t>Browser auto-sends cookies → attacker forges a state-changing request</a:t>
             </a:r>
             <a:endParaRPr lang="en-US" sz="1400" dirty="0"/>
           </a:p>
@@ -3422,7 +3584,7 @@
                 <a:ea typeface="Calibri" pitchFamily="34" charset="-122"/>
                 <a:cs typeface="Calibri" pitchFamily="34" charset="-120"/>
               </a:rPr>
-              <a:t>CWE-352 — CSRF</a:t>
+              <a:t>Real defenses: anti-CSRF tokens, checking Origin/Referer, and the endpoint actually checking who's asking</a:t>
             </a:r>
             <a:endParaRPr lang="en-US" sz="1400" dirty="0"/>
           </a:p>
@@ -3443,7 +3605,7 @@
                 <a:ea typeface="Calibri" pitchFamily="34" charset="-122"/>
                 <a:cs typeface="Calibri" pitchFamily="34" charset="-120"/>
               </a:rPr>
-              <a:t>CWE-1004 — cookie set without HttpOnly (this week's cookie-theft task)</a:t>
+              <a:t>SameSite=Strict alone stops the cookie from attaching cross-site — it does not stop a request from being accepted if the endpoint never checks authorization in the first place (today's lab proves this)</a:t>
             </a:r>
             <a:endParaRPr lang="en-US" sz="1400" dirty="0"/>
           </a:p>
@@ -3628,7 +3790,7 @@
                 <a:ea typeface="Arial" pitchFamily="34" charset="-122"/>
                 <a:cs typeface="Arial" pitchFamily="34" charset="-120"/>
               </a:rPr>
-              <a:t>Defenses</a:t>
+              <a:t>Same cookie, opposite directions</a:t>
             </a:r>
             <a:endParaRPr lang="en-US" sz="2600" dirty="0"/>
           </a:p>
@@ -3636,43 +3798,14 @@
       </p:sp>
       <p:sp>
         <p:nvSpPr>
-          <p:cNvPr id="5" name="Shape 2"/>
-          <p:cNvSpPr/>
-          <p:nvPr/>
-        </p:nvSpPr>
-        <p:spPr>
-          <a:xfrm>
-            <a:off x="457200" y="1325880"/>
-            <a:ext cx="8229600" cy="1920240"/>
-          </a:xfrm>
-          <a:prstGeom prst="roundRect">
-            <a:avLst>
-              <a:gd name="adj" fmla="val 3810"/>
-            </a:avLst>
-          </a:prstGeom>
-          <a:solidFill>
-            <a:srgbClr val="F1F5F9"/>
-          </a:solidFill>
-          <a:ln/>
-          <a:effectLst>
-            <a:outerShdw sx="100000" sy="100000" kx="0" ky="0" algn="bl" rotWithShape="0" blurRad="76200" dist="25400" dir="5400000">
-              <a:srgbClr val="000000">
-                <a:alpha val="12000"/>
-              </a:srgbClr>
-            </a:outerShdw>
-          </a:effectLst>
-        </p:spPr>
-      </p:sp>
-      <p:sp>
-        <p:nvSpPr>
-          <p:cNvPr id="6" name="Text 3"/>
-          <p:cNvSpPr/>
-          <p:nvPr/>
-        </p:nvSpPr>
-        <p:spPr>
-          <a:xfrm>
-            <a:off x="731520" y="1435608"/>
-            <a:ext cx="7680960" cy="1700784"/>
+          <p:cNvPr id="5" name="Text 2"/>
+          <p:cNvSpPr/>
+          <p:nvPr/>
+        </p:nvSpPr>
+        <p:spPr>
+          <a:xfrm>
+            <a:off x="548640" y="1325880"/>
+            <a:ext cx="8046720" cy="2468880"/>
           </a:xfrm>
           <a:prstGeom prst="rect">
             <a:avLst/>
@@ -3686,12 +3819,8 @@
           </a:bodyPr>
           <a:lstStyle/>
           <a:p>
-            <a:pPr marL="342900" indent="-342900">
-              <a:spcAft>
-                <a:spcPts val="600"/>
-              </a:spcAft>
-              <a:buSzPct val="100000"/>
-              <a:buChar char="•"/>
+            <a:pPr indent="0" marL="0">
+              <a:buNone/>
             </a:pPr>
             <a:r>
               <a:rPr lang="en-US" sz="1400" dirty="0">
@@ -3702,108 +3831,45 @@
                 <a:ea typeface="Calibri" pitchFamily="34" charset="-122"/>
                 <a:cs typeface="Calibri" pitchFamily="34" charset="-120"/>
               </a:rPr>
-              <a:t>Output encoding per context (HTML/attr/JS/URL)</a:t>
+              <a:t>See diagram: Two stacked panels comparing stored XSS with CSRF, using the same attacker/server/victim actors. Stored XSS: attacker posts a script, the victim loads it, it runs in the victim's origin and steals the cookie (no HttpOnly) — fixed by output encoding, not SameSite, since the payload is already same-origin. CSRF: the victim visits the attacker's page, which auto-submits a form; the browser attaches the cookie itself and the server can't tell the victim never meant to send it — fixed by SameSite plus a CSRF token the server actually checks, not HttpOnly, since no script ever reads the cookie. (web only)</a:t>
             </a:r>
             <a:endParaRPr lang="en-US" sz="1400" dirty="0"/>
           </a:p>
-          <a:p>
-            <a:pPr marL="342900" indent="-342900">
-              <a:spcAft>
-                <a:spcPts val="600"/>
-              </a:spcAft>
-              <a:buSzPct val="100000"/>
-              <a:buChar char="•"/>
-            </a:pPr>
-            <a:r>
-              <a:rPr lang="en-US" sz="1400" dirty="0">
-                <a:solidFill>
-                  <a:srgbClr val="1F2937"/>
+        </p:txBody>
+      </p:sp>
+      <p:sp>
+        <p:nvSpPr>
+          <p:cNvPr id="6" name="Text 3"/>
+          <p:cNvSpPr/>
+          <p:nvPr/>
+        </p:nvSpPr>
+        <p:spPr>
+          <a:xfrm>
+            <a:off x="457200" y="4800600"/>
+            <a:ext cx="6949440" cy="274320"/>
+          </a:xfrm>
+          <a:prstGeom prst="rect">
+            <a:avLst/>
+          </a:prstGeom>
+          <a:noFill/>
+          <a:ln/>
+        </p:spPr>
+        <p:txBody>
+          <a:bodyPr wrap="square" lIns="0" tIns="0" rIns="0" bIns="0" rtlCol="0" anchor="ctr"/>
+          <a:lstStyle/>
+          <a:p>
+            <a:pPr indent="0" marL="0">
+              <a:buNone/>
+            </a:pPr>
+            <a:r>
+              <a:rPr lang="en-US" sz="900" dirty="0">
+                <a:solidFill>
+                  <a:srgbClr val="64748B"/>
                 </a:solidFill>
                 <a:latin typeface="Calibri" pitchFamily="34" charset="0"/>
                 <a:ea typeface="Calibri" pitchFamily="34" charset="-122"/>
                 <a:cs typeface="Calibri" pitchFamily="34" charset="-120"/>
               </a:rPr>
-              <a:t>Framework auto-escaping (don't bypass with innerHTML/dangerouslySetInnerHTML)</a:t>
-            </a:r>
-            <a:endParaRPr lang="en-US" sz="1400" dirty="0"/>
-          </a:p>
-          <a:p>
-            <a:pPr marL="342900" indent="-342900">
-              <a:spcAft>
-                <a:spcPts val="600"/>
-              </a:spcAft>
-              <a:buSzPct val="100000"/>
-              <a:buChar char="•"/>
-            </a:pPr>
-            <a:r>
-              <a:rPr lang="en-US" sz="1400" dirty="0">
-                <a:solidFill>
-                  <a:srgbClr val="1F2937"/>
-                </a:solidFill>
-                <a:latin typeface="Calibri" pitchFamily="34" charset="0"/>
-                <a:ea typeface="Calibri" pitchFamily="34" charset="-122"/>
-                <a:cs typeface="Calibri" pitchFamily="34" charset="-120"/>
-              </a:rPr>
-              <a:t>Content Security Policy — a defense-in-depth header, set alongside escaping — it doesn't replace it</a:t>
-            </a:r>
-            <a:endParaRPr lang="en-US" sz="1400" dirty="0"/>
-          </a:p>
-          <a:p>
-            <a:pPr marL="342900" indent="-342900">
-              <a:spcAft>
-                <a:spcPts val="600"/>
-              </a:spcAft>
-              <a:buSzPct val="100000"/>
-              <a:buChar char="•"/>
-            </a:pPr>
-            <a:r>
-              <a:rPr lang="en-US" sz="1400" dirty="0">
-                <a:solidFill>
-                  <a:srgbClr val="1F2937"/>
-                </a:solidFill>
-                <a:latin typeface="Calibri" pitchFamily="34" charset="0"/>
-                <a:ea typeface="Calibri" pitchFamily="34" charset="-122"/>
-                <a:cs typeface="Calibri" pitchFamily="34" charset="-120"/>
-              </a:rPr>
-              <a:t>HttpOnly + SameSite cookies; anti-CSRF tokens and an endpoint that actually checks who's asking</a:t>
-            </a:r>
-            <a:endParaRPr lang="en-US" sz="1400" dirty="0"/>
-          </a:p>
-        </p:txBody>
-      </p:sp>
-      <p:sp>
-        <p:nvSpPr>
-          <p:cNvPr id="7" name="Text 4"/>
-          <p:cNvSpPr/>
-          <p:nvPr/>
-        </p:nvSpPr>
-        <p:spPr>
-          <a:xfrm>
-            <a:off x="457200" y="4800600"/>
-            <a:ext cx="6949440" cy="274320"/>
-          </a:xfrm>
-          <a:prstGeom prst="rect">
-            <a:avLst/>
-          </a:prstGeom>
-          <a:noFill/>
-          <a:ln/>
-        </p:spPr>
-        <p:txBody>
-          <a:bodyPr wrap="square" lIns="0" tIns="0" rIns="0" bIns="0" rtlCol="0" anchor="ctr"/>
-          <a:lstStyle/>
-          <a:p>
-            <a:pPr indent="0" marL="0">
-              <a:buNone/>
-            </a:pPr>
-            <a:r>
-              <a:rPr lang="en-US" sz="900" dirty="0">
-                <a:solidFill>
-                  <a:srgbClr val="64748B"/>
-                </a:solidFill>
-                <a:latin typeface="Calibri" pitchFamily="34" charset="0"/>
-                <a:ea typeface="Calibri" pitchFamily="34" charset="-122"/>
-                <a:cs typeface="Calibri" pitchFamily="34" charset="-120"/>
-              </a:rPr>
               <a:t>Software Security · Week 5</a:t>
             </a:r>
             <a:endParaRPr lang="en-US" sz="900" dirty="0"/>
@@ -3812,7 +3878,7 @@
       </p:sp>
       <p:pic>
         <p:nvPicPr>
-          <p:cNvPr id="8" name="Image 1" descr="/Users/pop7/Library/CloudStorage/OneDrive-MonsterConnectCo.,Ltd/Lecture/KOSEN69 - software-security/slides/pptx/assets/logo-small.png">    </p:cNvPr>
+          <p:cNvPr id="7" name="Image 1" descr="/Users/pop7/Library/CloudStorage/OneDrive-MonsterConnectCo.,Ltd/Lecture/KOSEN69 - software-security/slides/pptx/assets/logo-small.png">    </p:cNvPr>
           <p:cNvPicPr>
             <a:picLocks noChangeAspect="1"/>
           </p:cNvPicPr>
@@ -3950,7 +4016,7 @@
                 <a:ea typeface="Arial" pitchFamily="34" charset="-122"/>
                 <a:cs typeface="Arial" pitchFamily="34" charset="-120"/>
               </a:rPr>
-              <a:t>⛳ Game — XSS Golf</a:t>
+              <a:t>Real-world: British Airways (2018)</a:t>
             </a:r>
             <a:endParaRPr lang="en-US" sz="2600" dirty="0"/>
           </a:p>
@@ -3958,59 +4024,18 @@
       </p:sp>
       <p:sp>
         <p:nvSpPr>
-          <p:cNvPr id="5" name="Text 2"/>
-          <p:cNvSpPr/>
-          <p:nvPr/>
-        </p:nvSpPr>
-        <p:spPr>
-          <a:xfrm>
-            <a:off x="548640" y="1325880"/>
-            <a:ext cx="8046720" cy="822960"/>
-          </a:xfrm>
-          <a:prstGeom prst="rect">
-            <a:avLst/>
-          </a:prstGeom>
-          <a:noFill/>
-          <a:ln/>
-        </p:spPr>
-        <p:txBody>
-          <a:bodyPr wrap="square" lIns="0" tIns="0" rIns="0" bIns="0" rtlCol="0" anchor="t">
-            <a:normAutofit/>
-          </a:bodyPr>
-          <a:lstStyle/>
-          <a:p>
-            <a:pPr indent="0" marL="0">
-              <a:buNone/>
-            </a:pPr>
-            <a:r>
-              <a:rPr lang="en-US" sz="1400" dirty="0">
-                <a:solidFill>
-                  <a:srgbClr val="1F2937"/>
-                </a:solidFill>
-                <a:latin typeface="Calibri" pitchFamily="34" charset="0"/>
-                <a:ea typeface="Calibri" pitchFamily="34" charset="-122"/>
-                <a:cs typeface="Calibri" pitchFamily="34" charset="-120"/>
-              </a:rPr>
-              <a:t>Craft the shortest payload that pops alert(1) / steals a cookie against vulnerable_app.py.</a:t>
-            </a:r>
-            <a:endParaRPr lang="en-US" sz="1400" dirty="0"/>
-          </a:p>
-        </p:txBody>
-      </p:sp>
-      <p:sp>
-        <p:nvSpPr>
-          <p:cNvPr id="6" name="Shape 3"/>
-          <p:cNvSpPr/>
-          <p:nvPr/>
-        </p:nvSpPr>
-        <p:spPr>
-          <a:xfrm>
-            <a:off x="457200" y="2240280"/>
-            <a:ext cx="8229600" cy="1298448"/>
+          <p:cNvPr id="5" name="Shape 2"/>
+          <p:cNvSpPr/>
+          <p:nvPr/>
+        </p:nvSpPr>
+        <p:spPr>
+          <a:xfrm>
+            <a:off x="457200" y="1325880"/>
+            <a:ext cx="8229600" cy="1408176"/>
           </a:xfrm>
           <a:prstGeom prst="roundRect">
             <a:avLst>
-              <a:gd name="adj" fmla="val 5634"/>
+              <a:gd name="adj" fmla="val 5195"/>
             </a:avLst>
           </a:prstGeom>
           <a:solidFill>
@@ -4028,14 +4053,14 @@
       </p:sp>
       <p:sp>
         <p:nvSpPr>
-          <p:cNvPr id="7" name="Text 4"/>
-          <p:cNvSpPr/>
-          <p:nvPr/>
-        </p:nvSpPr>
-        <p:spPr>
-          <a:xfrm>
-            <a:off x="731520" y="2350008"/>
-            <a:ext cx="7680960" cy="1078992"/>
+          <p:cNvPr id="6" name="Text 3"/>
+          <p:cNvSpPr/>
+          <p:nvPr/>
+        </p:nvSpPr>
+        <p:spPr>
+          <a:xfrm>
+            <a:off x="731520" y="1435608"/>
+            <a:ext cx="7680960" cy="1188720"/>
           </a:xfrm>
           <a:prstGeom prst="rect">
             <a:avLst/>
@@ -4065,7 +4090,7 @@
                 <a:ea typeface="Calibri" pitchFamily="34" charset="-122"/>
                 <a:cs typeface="Calibri" pitchFamily="34" charset="-120"/>
               </a:rPr>
-              <a:t>Solo scoring by character count (no filter to beat — it's a golf exercise, not a bypass race)</a:t>
+              <a:t>Attackers injected malicious JS (Magecart) into BA's site/app</a:t>
             </a:r>
             <a:endParaRPr lang="en-US" sz="1400" dirty="0"/>
           </a:p>
@@ -4086,45 +4111,129 @@
                 <a:ea typeface="Calibri" pitchFamily="34" charset="-122"/>
                 <a:cs typeface="Calibri" pitchFamily="34" charset="-120"/>
               </a:rPr>
-              <a:t>Defend: run fixed_app.py — same payloads, now escaped — then prove CSRF still works against it and explain why</a:t>
+              <a:t>Script skimmed credit-card details as users typed</a:t>
             </a:r>
             <a:endParaRPr lang="en-US" sz="1400" dirty="0"/>
           </a:p>
-        </p:txBody>
-      </p:sp>
-      <p:sp>
-        <p:nvSpPr>
-          <p:cNvPr id="8" name="Text 5"/>
-          <p:cNvSpPr/>
-          <p:nvPr/>
-        </p:nvSpPr>
-        <p:spPr>
-          <a:xfrm>
-            <a:off x="457200" y="4800600"/>
-            <a:ext cx="6949440" cy="274320"/>
-          </a:xfrm>
-          <a:prstGeom prst="rect">
-            <a:avLst/>
-          </a:prstGeom>
-          <a:noFill/>
-          <a:ln/>
-        </p:spPr>
-        <p:txBody>
-          <a:bodyPr wrap="square" lIns="0" tIns="0" rIns="0" bIns="0" rtlCol="0" anchor="ctr"/>
-          <a:lstStyle/>
-          <a:p>
-            <a:pPr indent="0" marL="0">
-              <a:buNone/>
-            </a:pPr>
-            <a:r>
-              <a:rPr lang="en-US" sz="900" dirty="0">
-                <a:solidFill>
-                  <a:srgbClr val="64748B"/>
+          <a:p>
+            <a:pPr marL="342900" indent="-342900">
+              <a:spcAft>
+                <a:spcPts val="600"/>
+              </a:spcAft>
+              <a:buSzPct val="100000"/>
+              <a:buChar char="•"/>
+            </a:pPr>
+            <a:r>
+              <a:rPr lang="en-US" sz="1400" dirty="0">
+                <a:solidFill>
+                  <a:srgbClr val="1F2937"/>
                 </a:solidFill>
                 <a:latin typeface="Calibri" pitchFamily="34" charset="0"/>
                 <a:ea typeface="Calibri" pitchFamily="34" charset="-122"/>
                 <a:cs typeface="Calibri" pitchFamily="34" charset="-120"/>
               </a:rPr>
+              <a:t>~380k payment records skimmed; ICO proposed a £183M fine, finalized at £20M (2020, ~89% reduction)</a:t>
+            </a:r>
+            <a:endParaRPr lang="en-US" sz="1400" dirty="0"/>
+          </a:p>
+        </p:txBody>
+      </p:sp>
+      <p:sp>
+        <p:nvSpPr>
+          <p:cNvPr id="7" name="Shape 4"/>
+          <p:cNvSpPr/>
+          <p:nvPr/>
+        </p:nvSpPr>
+        <p:spPr>
+          <a:xfrm>
+            <a:off x="457200" y="2898648"/>
+            <a:ext cx="8229600" cy="822960"/>
+          </a:xfrm>
+          <a:prstGeom prst="roundRect">
+            <a:avLst>
+              <a:gd name="adj" fmla="val 8889"/>
+            </a:avLst>
+          </a:prstGeom>
+          <a:solidFill>
+            <a:srgbClr val="E8EDF3"/>
+          </a:solidFill>
+          <a:ln/>
+        </p:spPr>
+      </p:sp>
+      <p:sp>
+        <p:nvSpPr>
+          <p:cNvPr id="8" name="Text 5"/>
+          <p:cNvSpPr/>
+          <p:nvPr/>
+        </p:nvSpPr>
+        <p:spPr>
+          <a:xfrm>
+            <a:off x="731520" y="2898648"/>
+            <a:ext cx="7680960" cy="822960"/>
+          </a:xfrm>
+          <a:prstGeom prst="rect">
+            <a:avLst/>
+          </a:prstGeom>
+          <a:noFill/>
+          <a:ln/>
+        </p:spPr>
+        <p:txBody>
+          <a:bodyPr wrap="square" lIns="0" tIns="0" rIns="0" bIns="0" rtlCol="0" anchor="ctr">
+            <a:normAutofit/>
+          </a:bodyPr>
+          <a:lstStyle/>
+          <a:p>
+            <a:pPr indent="0" marL="0">
+              <a:buNone/>
+            </a:pPr>
+            <a:r>
+              <a:rPr lang="en-US" sz="1400" i="1" dirty="0">
+                <a:solidFill>
+                  <a:srgbClr val="E35205"/>
+                </a:solidFill>
+                <a:latin typeface="Calibri" pitchFamily="34" charset="0"/>
+                <a:ea typeface="Calibri" pitchFamily="34" charset="-122"/>
+                <a:cs typeface="Calibri" pitchFamily="34" charset="-120"/>
+              </a:rPr>
+              <a:t>Client-side injection = real money + real fines.</a:t>
+            </a:r>
+            <a:endParaRPr lang="en-US" sz="1400" dirty="0"/>
+          </a:p>
+        </p:txBody>
+      </p:sp>
+      <p:sp>
+        <p:nvSpPr>
+          <p:cNvPr id="9" name="Text 6"/>
+          <p:cNvSpPr/>
+          <p:nvPr/>
+        </p:nvSpPr>
+        <p:spPr>
+          <a:xfrm>
+            <a:off x="457200" y="4800600"/>
+            <a:ext cx="6949440" cy="274320"/>
+          </a:xfrm>
+          <a:prstGeom prst="rect">
+            <a:avLst/>
+          </a:prstGeom>
+          <a:noFill/>
+          <a:ln/>
+        </p:spPr>
+        <p:txBody>
+          <a:bodyPr wrap="square" lIns="0" tIns="0" rIns="0" bIns="0" rtlCol="0" anchor="ctr"/>
+          <a:lstStyle/>
+          <a:p>
+            <a:pPr indent="0" marL="0">
+              <a:buNone/>
+            </a:pPr>
+            <a:r>
+              <a:rPr lang="en-US" sz="900" dirty="0">
+                <a:solidFill>
+                  <a:srgbClr val="64748B"/>
+                </a:solidFill>
+                <a:latin typeface="Calibri" pitchFamily="34" charset="0"/>
+                <a:ea typeface="Calibri" pitchFamily="34" charset="-122"/>
+                <a:cs typeface="Calibri" pitchFamily="34" charset="-120"/>
+              </a:rPr>
               <a:t>Software Security · Week 5</a:t>
             </a:r>
             <a:endParaRPr lang="en-US" sz="900" dirty="0"/>
@@ -4133,7 +4242,7 @@
       </p:sp>
       <p:pic>
         <p:nvPicPr>
-          <p:cNvPr id="9" name="Image 1" descr="/Users/pop7/Library/CloudStorage/OneDrive-MonsterConnectCo.,Ltd/Lecture/KOSEN69 - software-security/slides/pptx/assets/logo-small.png">    </p:cNvPr>
+          <p:cNvPr id="10" name="Image 1" descr="/Users/pop7/Library/CloudStorage/OneDrive-MonsterConnectCo.,Ltd/Lecture/KOSEN69 - software-security/slides/pptx/assets/logo-small.png">    </p:cNvPr>
           <p:cNvPicPr>
             <a:picLocks noChangeAspect="1"/>
           </p:cNvPicPr>
@@ -4271,7 +4380,7 @@
                 <a:ea typeface="Arial" pitchFamily="34" charset="-122"/>
                 <a:cs typeface="Arial" pitchFamily="34" charset="-120"/>
               </a:rPr>
-              <a:t>Lab steps</a:t>
+              <a:t>CWE mapping</a:t>
             </a:r>
             <a:endParaRPr lang="en-US" sz="2600" dirty="0"/>
           </a:p>
@@ -4286,17 +4395,24 @@
         <p:spPr>
           <a:xfrm>
             <a:off x="457200" y="1325880"/>
-            <a:ext cx="8229600" cy="822960"/>
+            <a:ext cx="8229600" cy="1207008"/>
           </a:xfrm>
           <a:prstGeom prst="roundRect">
             <a:avLst>
-              <a:gd name="adj" fmla="val 8889"/>
+              <a:gd name="adj" fmla="val 6061"/>
             </a:avLst>
           </a:prstGeom>
           <a:solidFill>
-            <a:srgbClr val="E8EDF3"/>
+            <a:srgbClr val="F1F5F9"/>
           </a:solidFill>
           <a:ln/>
+          <a:effectLst>
+            <a:outerShdw sx="100000" sy="100000" kx="0" ky="0" algn="bl" rotWithShape="0" blurRad="76200" dist="25400" dir="5400000">
+              <a:srgbClr val="000000">
+                <a:alpha val="12000"/>
+              </a:srgbClr>
+            </a:outerShdw>
+          </a:effectLst>
         </p:spPr>
       </p:sp>
       <p:sp>
@@ -4307,8 +4423,8 @@
         </p:nvSpPr>
         <p:spPr>
           <a:xfrm>
-            <a:off x="731520" y="1325880"/>
-            <a:ext cx="7680960" cy="822960"/>
+            <a:off x="731520" y="1435608"/>
+            <a:ext cx="7680960" cy="987552"/>
           </a:xfrm>
           <a:prstGeom prst="rect">
             <a:avLst/>
@@ -4317,116 +4433,41 @@
           <a:ln/>
         </p:spPr>
         <p:txBody>
-          <a:bodyPr wrap="square" lIns="0" tIns="0" rIns="0" bIns="0" rtlCol="0" anchor="ctr">
+          <a:bodyPr wrap="square" lIns="0" tIns="0" rIns="0" bIns="0" rtlCol="0" anchor="t">
             <a:normAutofit/>
           </a:bodyPr>
           <a:lstStyle/>
           <a:p>
-            <a:pPr indent="0" marL="0">
-              <a:buNone/>
-            </a:pPr>
-            <a:r>
-              <a:rPr lang="en-US" sz="1400" i="1" dirty="0">
-                <a:solidFill>
-                  <a:srgbClr val="E35205"/>
+            <a:pPr marL="342900" indent="-342900">
+              <a:spcAft>
+                <a:spcPts val="600"/>
+              </a:spcAft>
+              <a:buSzPct val="100000"/>
+              <a:buChar char="•"/>
+            </a:pPr>
+            <a:r>
+              <a:rPr lang="en-US" sz="1400" dirty="0">
+                <a:solidFill>
+                  <a:srgbClr val="1F2937"/>
                 </a:solidFill>
                 <a:latin typeface="Calibri" pitchFamily="34" charset="0"/>
                 <a:ea typeface="Calibri" pitchFamily="34" charset="-122"/>
                 <a:cs typeface="Calibri" pitchFamily="34" charset="-120"/>
               </a:rPr>
-              <a:t>📋 Worksheet 5 — labs/week05-xss-client-side/worksheet.md (Part 3) · kickoff: docker compose up → http://localhost:8080</a:t>
+              <a:t>CWE-79 — Cross-site scripting</a:t>
             </a:r>
             <a:endParaRPr lang="en-US" sz="1400" dirty="0"/>
           </a:p>
-        </p:txBody>
-      </p:sp>
-      <p:sp>
-        <p:nvSpPr>
-          <p:cNvPr id="7" name="Shape 4"/>
-          <p:cNvSpPr/>
-          <p:nvPr/>
-        </p:nvSpPr>
-        <p:spPr>
-          <a:xfrm>
-            <a:off x="502920" y="2313432"/>
-            <a:ext cx="384048" cy="384048"/>
-          </a:xfrm>
-          <a:prstGeom prst="ellipse">
-            <a:avLst/>
-          </a:prstGeom>
-          <a:solidFill>
-            <a:srgbClr val="E35205"/>
-          </a:solidFill>
-          <a:ln/>
-        </p:spPr>
-      </p:sp>
-      <p:sp>
-        <p:nvSpPr>
-          <p:cNvPr id="8" name="Text 5"/>
-          <p:cNvSpPr/>
-          <p:nvPr/>
-        </p:nvSpPr>
-        <p:spPr>
-          <a:xfrm>
-            <a:off x="502920" y="2313432"/>
-            <a:ext cx="384048" cy="384048"/>
-          </a:xfrm>
-          <a:prstGeom prst="rect">
-            <a:avLst/>
-          </a:prstGeom>
-          <a:noFill/>
-          <a:ln/>
-        </p:spPr>
-        <p:txBody>
-          <a:bodyPr wrap="square" lIns="0" tIns="0" rIns="0" bIns="0" rtlCol="0" anchor="ctr"/>
-          <a:lstStyle/>
-          <a:p>
-            <a:pPr algn="ctr" indent="0" marL="0">
-              <a:buNone/>
-            </a:pPr>
-            <a:r>
-              <a:rPr lang="en-US" sz="1500" b="1" dirty="0">
-                <a:solidFill>
-                  <a:srgbClr val="0E1726"/>
-                </a:solidFill>
-                <a:latin typeface="Arial" pitchFamily="34" charset="0"/>
-                <a:ea typeface="Arial" pitchFamily="34" charset="-122"/>
-                <a:cs typeface="Arial" pitchFamily="34" charset="-120"/>
-              </a:rPr>
-              <a:t>1</a:t>
-            </a:r>
-            <a:endParaRPr lang="en-US" sz="1500" dirty="0"/>
-          </a:p>
-        </p:txBody>
-      </p:sp>
-      <p:sp>
-        <p:nvSpPr>
-          <p:cNvPr id="9" name="Text 6"/>
-          <p:cNvSpPr/>
-          <p:nvPr/>
-        </p:nvSpPr>
-        <p:spPr>
-          <a:xfrm>
-            <a:off x="1051560" y="2313432"/>
-            <a:ext cx="7589520" cy="658368"/>
-          </a:xfrm>
-          <a:prstGeom prst="rect">
-            <a:avLst/>
-          </a:prstGeom>
-          <a:noFill/>
-          <a:ln/>
-        </p:spPr>
-        <p:txBody>
-          <a:bodyPr wrap="square" lIns="0" tIns="0" rIns="0" bIns="0" rtlCol="0" anchor="ctr">
-            <a:normAutofit/>
-          </a:bodyPr>
-          <a:lstStyle/>
-          <a:p>
-            <a:pPr indent="0" marL="0">
-              <a:buNone/>
-            </a:pPr>
-            <a:r>
-              <a:rPr lang="en-US" sz="1350" dirty="0">
+          <a:p>
+            <a:pPr marL="342900" indent="-342900">
+              <a:spcAft>
+                <a:spcPts val="600"/>
+              </a:spcAft>
+              <a:buSzPct val="100000"/>
+              <a:buChar char="•"/>
+            </a:pPr>
+            <a:r>
+              <a:rPr lang="en-US" sz="1400" dirty="0">
                 <a:solidFill>
                   <a:srgbClr val="1F2937"/>
                 </a:solidFill>
@@ -4434,99 +4475,20 @@
                 <a:ea typeface="Calibri" pitchFamily="34" charset="-122"/>
                 <a:cs typeface="Calibri" pitchFamily="34" charset="-120"/>
               </a:rPr>
-              <a:t>Find reflected + stored XSS in vulnerable_app.py (DOM XSS via Juice Shop is optional/ungraded)</a:t>
-            </a:r>
-            <a:endParaRPr lang="en-US" sz="1350" dirty="0"/>
-          </a:p>
-        </p:txBody>
-      </p:sp>
-      <p:sp>
-        <p:nvSpPr>
-          <p:cNvPr id="10" name="Shape 7"/>
-          <p:cNvSpPr/>
-          <p:nvPr/>
-        </p:nvSpPr>
-        <p:spPr>
-          <a:xfrm>
-            <a:off x="502920" y="3044952"/>
-            <a:ext cx="384048" cy="384048"/>
-          </a:xfrm>
-          <a:prstGeom prst="ellipse">
-            <a:avLst/>
-          </a:prstGeom>
-          <a:solidFill>
-            <a:srgbClr val="E35205"/>
-          </a:solidFill>
-          <a:ln/>
-        </p:spPr>
-      </p:sp>
-      <p:sp>
-        <p:nvSpPr>
-          <p:cNvPr id="11" name="Text 8"/>
-          <p:cNvSpPr/>
-          <p:nvPr/>
-        </p:nvSpPr>
-        <p:spPr>
-          <a:xfrm>
-            <a:off x="502920" y="3044952"/>
-            <a:ext cx="384048" cy="384048"/>
-          </a:xfrm>
-          <a:prstGeom prst="rect">
-            <a:avLst/>
-          </a:prstGeom>
-          <a:noFill/>
-          <a:ln/>
-        </p:spPr>
-        <p:txBody>
-          <a:bodyPr wrap="square" lIns="0" tIns="0" rIns="0" bIns="0" rtlCol="0" anchor="ctr"/>
-          <a:lstStyle/>
-          <a:p>
-            <a:pPr algn="ctr" indent="0" marL="0">
-              <a:buNone/>
-            </a:pPr>
-            <a:r>
-              <a:rPr lang="en-US" sz="1500" b="1" dirty="0">
-                <a:solidFill>
-                  <a:srgbClr val="0E1726"/>
-                </a:solidFill>
-                <a:latin typeface="Arial" pitchFamily="34" charset="0"/>
-                <a:ea typeface="Arial" pitchFamily="34" charset="-122"/>
-                <a:cs typeface="Arial" pitchFamily="34" charset="-120"/>
-              </a:rPr>
-              <a:t>2</a:t>
-            </a:r>
-            <a:endParaRPr lang="en-US" sz="1500" dirty="0"/>
-          </a:p>
-        </p:txBody>
-      </p:sp>
-      <p:sp>
-        <p:nvSpPr>
-          <p:cNvPr id="12" name="Text 9"/>
-          <p:cNvSpPr/>
-          <p:nvPr/>
-        </p:nvSpPr>
-        <p:spPr>
-          <a:xfrm>
-            <a:off x="1051560" y="3044952"/>
-            <a:ext cx="7589520" cy="402336"/>
-          </a:xfrm>
-          <a:prstGeom prst="rect">
-            <a:avLst/>
-          </a:prstGeom>
-          <a:noFill/>
-          <a:ln/>
-        </p:spPr>
-        <p:txBody>
-          <a:bodyPr wrap="square" lIns="0" tIns="0" rIns="0" bIns="0" rtlCol="0" anchor="ctr">
-            <a:normAutofit/>
-          </a:bodyPr>
-          <a:lstStyle/>
-          <a:p>
-            <a:pPr indent="0" marL="0">
-              <a:buNone/>
-            </a:pPr>
-            <a:r>
-              <a:rPr lang="en-US" sz="1350" dirty="0">
+              <a:t>CWE-352 — CSRF</a:t>
+            </a:r>
+            <a:endParaRPr lang="en-US" sz="1400" dirty="0"/>
+          </a:p>
+          <a:p>
+            <a:pPr marL="342900" indent="-342900">
+              <a:spcAft>
+                <a:spcPts val="600"/>
+              </a:spcAft>
+              <a:buSzPct val="100000"/>
+              <a:buChar char="•"/>
+            </a:pPr>
+            <a:r>
+              <a:rPr lang="en-US" sz="1400" dirty="0">
                 <a:solidFill>
                   <a:srgbClr val="1F2937"/>
                 </a:solidFill>
@@ -4534,42 +4496,22 @@
                 <a:ea typeface="Calibri" pitchFamily="34" charset="-122"/>
                 <a:cs typeface="Calibri" pitchFamily="34" charset="-120"/>
               </a:rPr>
-              <a:t>Demonstrate cookie theft via the stored payload</a:t>
-            </a:r>
-            <a:endParaRPr lang="en-US" sz="1350" dirty="0"/>
-          </a:p>
-        </p:txBody>
-      </p:sp>
-      <p:sp>
-        <p:nvSpPr>
-          <p:cNvPr id="13" name="Shape 10"/>
-          <p:cNvSpPr/>
-          <p:nvPr/>
-        </p:nvSpPr>
-        <p:spPr>
-          <a:xfrm>
-            <a:off x="502920" y="3520440"/>
-            <a:ext cx="384048" cy="384048"/>
-          </a:xfrm>
-          <a:prstGeom prst="ellipse">
-            <a:avLst/>
-          </a:prstGeom>
-          <a:solidFill>
-            <a:srgbClr val="E35205"/>
-          </a:solidFill>
-          <a:ln/>
-        </p:spPr>
-      </p:sp>
-      <p:sp>
-        <p:nvSpPr>
-          <p:cNvPr id="14" name="Text 11"/>
-          <p:cNvSpPr/>
-          <p:nvPr/>
-        </p:nvSpPr>
-        <p:spPr>
-          <a:xfrm>
-            <a:off x="502920" y="3520440"/>
-            <a:ext cx="384048" cy="384048"/>
+              <a:t>CWE-1004 — cookie set without HttpOnly (this week's cookie-theft task)</a:t>
+            </a:r>
+            <a:endParaRPr lang="en-US" sz="1400" dirty="0"/>
+          </a:p>
+        </p:txBody>
+      </p:sp>
+      <p:sp>
+        <p:nvSpPr>
+          <p:cNvPr id="7" name="Text 4"/>
+          <p:cNvSpPr/>
+          <p:nvPr/>
+        </p:nvSpPr>
+        <p:spPr>
+          <a:xfrm>
+            <a:off x="457200" y="4800600"/>
+            <a:ext cx="6949440" cy="274320"/>
           </a:xfrm>
           <a:prstGeom prst="rect">
             <a:avLst/>
@@ -4579,100 +4521,20 @@
         </p:spPr>
         <p:txBody>
           <a:bodyPr wrap="square" lIns="0" tIns="0" rIns="0" bIns="0" rtlCol="0" anchor="ctr"/>
-          <a:lstStyle/>
-          <a:p>
-            <a:pPr algn="ctr" indent="0" marL="0">
-              <a:buNone/>
-            </a:pPr>
-            <a:r>
-              <a:rPr lang="en-US" sz="1500" b="1" dirty="0">
-                <a:solidFill>
-                  <a:srgbClr val="0E1726"/>
-                </a:solidFill>
-                <a:latin typeface="Arial" pitchFamily="34" charset="0"/>
-                <a:ea typeface="Arial" pitchFamily="34" charset="-122"/>
-                <a:cs typeface="Arial" pitchFamily="34" charset="-120"/>
-              </a:rPr>
-              <a:t>3</a:t>
-            </a:r>
-            <a:endParaRPr lang="en-US" sz="1500" dirty="0"/>
-          </a:p>
-        </p:txBody>
-      </p:sp>
-      <p:sp>
-        <p:nvSpPr>
-          <p:cNvPr id="15" name="Text 12"/>
-          <p:cNvSpPr/>
-          <p:nvPr/>
-        </p:nvSpPr>
-        <p:spPr>
-          <a:xfrm>
-            <a:off x="1051560" y="3520440"/>
-            <a:ext cx="7589520" cy="402336"/>
-          </a:xfrm>
-          <a:prstGeom prst="rect">
-            <a:avLst/>
-          </a:prstGeom>
-          <a:noFill/>
-          <a:ln/>
-        </p:spPr>
-        <p:txBody>
-          <a:bodyPr wrap="square" lIns="0" tIns="0" rIns="0" bIns="0" rtlCol="0" anchor="ctr">
-            <a:normAutofit/>
-          </a:bodyPr>
           <a:lstStyle/>
           <a:p>
             <a:pPr indent="0" marL="0">
               <a:buNone/>
             </a:pPr>
             <a:r>
-              <a:rPr lang="en-US" sz="1350" dirty="0">
-                <a:solidFill>
-                  <a:srgbClr val="1F2937"/>
+              <a:rPr lang="en-US" sz="900" dirty="0">
+                <a:solidFill>
+                  <a:srgbClr val="64748B"/>
                 </a:solidFill>
                 <a:latin typeface="Calibri" pitchFamily="34" charset="0"/>
                 <a:ea typeface="Calibri" pitchFamily="34" charset="-122"/>
                 <a:cs typeface="Calibri" pitchFamily="34" charset="-120"/>
               </a:rPr>
-              <a:t>Run fixed_app.py — confirm output encoding + CSP now block your XSS payloads</a:t>
-            </a:r>
-            <a:endParaRPr lang="en-US" sz="1350" dirty="0"/>
-          </a:p>
-        </p:txBody>
-      </p:sp>
-      <p:sp>
-        <p:nvSpPr>
-          <p:cNvPr id="16" name="Text 13"/>
-          <p:cNvSpPr/>
-          <p:nvPr/>
-        </p:nvSpPr>
-        <p:spPr>
-          <a:xfrm>
-            <a:off x="457200" y="4800600"/>
-            <a:ext cx="6949440" cy="274320"/>
-          </a:xfrm>
-          <a:prstGeom prst="rect">
-            <a:avLst/>
-          </a:prstGeom>
-          <a:noFill/>
-          <a:ln/>
-        </p:spPr>
-        <p:txBody>
-          <a:bodyPr wrap="square" lIns="0" tIns="0" rIns="0" bIns="0" rtlCol="0" anchor="ctr"/>
-          <a:lstStyle/>
-          <a:p>
-            <a:pPr indent="0" marL="0">
-              <a:buNone/>
-            </a:pPr>
-            <a:r>
-              <a:rPr lang="en-US" sz="900" dirty="0">
-                <a:solidFill>
-                  <a:srgbClr val="64748B"/>
-                </a:solidFill>
-                <a:latin typeface="Calibri" pitchFamily="34" charset="0"/>
-                <a:ea typeface="Calibri" pitchFamily="34" charset="-122"/>
-                <a:cs typeface="Calibri" pitchFamily="34" charset="-120"/>
-              </a:rPr>
               <a:t>Software Security · Week 5</a:t>
             </a:r>
             <a:endParaRPr lang="en-US" sz="900" dirty="0"/>
@@ -4681,7 +4543,7 @@
       </p:sp>
       <p:pic>
         <p:nvPicPr>
-          <p:cNvPr id="17" name="Image 1" descr="/Users/pop7/Library/CloudStorage/OneDrive-MonsterConnectCo.,Ltd/Lecture/KOSEN69 - software-security/slides/pptx/assets/logo-small.png">    </p:cNvPr>
+          <p:cNvPr id="8" name="Image 1" descr="/Users/pop7/Library/CloudStorage/OneDrive-MonsterConnectCo.,Ltd/Lecture/KOSEN69 - software-security/slides/pptx/assets/logo-small.png">    </p:cNvPr>
           <p:cNvPicPr>
             <a:picLocks noChangeAspect="1"/>
           </p:cNvPicPr>
@@ -4819,7 +4681,7 @@
                 <a:ea typeface="Arial" pitchFamily="34" charset="-122"/>
                 <a:cs typeface="Arial" pitchFamily="34" charset="-120"/>
               </a:rPr>
-              <a:t>Lab steps (cont.)</a:t>
+              <a:t>Defenses</a:t>
             </a:r>
             <a:endParaRPr lang="en-US" sz="2600" dirty="0"/>
           </a:p>
@@ -4833,16 +4695,25 @@
         </p:nvSpPr>
         <p:spPr>
           <a:xfrm>
-            <a:off x="502920" y="1325880"/>
-            <a:ext cx="384048" cy="384048"/>
-          </a:xfrm>
-          <a:prstGeom prst="ellipse">
-            <a:avLst/>
+            <a:off x="457200" y="1325880"/>
+            <a:ext cx="8229600" cy="1920240"/>
+          </a:xfrm>
+          <a:prstGeom prst="roundRect">
+            <a:avLst>
+              <a:gd name="adj" fmla="val 3810"/>
+            </a:avLst>
           </a:prstGeom>
           <a:solidFill>
-            <a:srgbClr val="E35205"/>
+            <a:srgbClr val="F1F5F9"/>
           </a:solidFill>
           <a:ln/>
+          <a:effectLst>
+            <a:outerShdw sx="100000" sy="100000" kx="0" ky="0" algn="bl" rotWithShape="0" blurRad="76200" dist="25400" dir="5400000">
+              <a:srgbClr val="000000">
+                <a:alpha val="12000"/>
+              </a:srgbClr>
+            </a:outerShdw>
+          </a:effectLst>
         </p:spPr>
       </p:sp>
       <p:sp>
@@ -4853,8 +4724,8 @@
         </p:nvSpPr>
         <p:spPr>
           <a:xfrm>
-            <a:off x="502920" y="1325880"/>
-            <a:ext cx="384048" cy="384048"/>
+            <a:off x="731520" y="1435608"/>
+            <a:ext cx="7680960" cy="1700784"/>
           </a:xfrm>
           <a:prstGeom prst="rect">
             <a:avLst/>
@@ -4863,55 +4734,20 @@
           <a:ln/>
         </p:spPr>
         <p:txBody>
-          <a:bodyPr wrap="square" lIns="0" tIns="0" rIns="0" bIns="0" rtlCol="0" anchor="ctr"/>
-          <a:lstStyle/>
-          <a:p>
-            <a:pPr algn="ctr" indent="0" marL="0">
-              <a:buNone/>
-            </a:pPr>
-            <a:r>
-              <a:rPr lang="en-US" sz="1500" b="1" dirty="0">
-                <a:solidFill>
-                  <a:srgbClr val="0E1726"/>
-                </a:solidFill>
-                <a:latin typeface="Arial" pitchFamily="34" charset="0"/>
-                <a:ea typeface="Arial" pitchFamily="34" charset="-122"/>
-                <a:cs typeface="Arial" pitchFamily="34" charset="-120"/>
-              </a:rPr>
-              <a:t>4</a:t>
-            </a:r>
-            <a:endParaRPr lang="en-US" sz="1500" dirty="0"/>
-          </a:p>
-        </p:txBody>
-      </p:sp>
-      <p:sp>
-        <p:nvSpPr>
-          <p:cNvPr id="7" name="Text 4"/>
-          <p:cNvSpPr/>
-          <p:nvPr/>
-        </p:nvSpPr>
-        <p:spPr>
-          <a:xfrm>
-            <a:off x="1051560" y="1325880"/>
-            <a:ext cx="7589520" cy="658368"/>
-          </a:xfrm>
-          <a:prstGeom prst="rect">
-            <a:avLst/>
-          </a:prstGeom>
-          <a:noFill/>
-          <a:ln/>
-        </p:spPr>
-        <p:txBody>
-          <a:bodyPr wrap="square" lIns="0" tIns="0" rIns="0" bIns="0" rtlCol="0" anchor="ctr">
+          <a:bodyPr wrap="square" lIns="0" tIns="0" rIns="0" bIns="0" rtlCol="0" anchor="t">
             <a:normAutofit/>
           </a:bodyPr>
           <a:lstStyle/>
           <a:p>
-            <a:pPr indent="0" marL="0">
-              <a:buNone/>
-            </a:pPr>
-            <a:r>
-              <a:rPr lang="en-US" sz="1350" dirty="0">
+            <a:pPr marL="342900" indent="-342900">
+              <a:spcAft>
+                <a:spcPts val="600"/>
+              </a:spcAft>
+              <a:buSzPct val="100000"/>
+              <a:buChar char="•"/>
+            </a:pPr>
+            <a:r>
+              <a:rPr lang="en-US" sz="1400" dirty="0">
                 <a:solidFill>
                   <a:srgbClr val="1F2937"/>
                 </a:solidFill>
@@ -4919,45 +4755,108 @@
                 <a:ea typeface="Calibri" pitchFamily="34" charset="-122"/>
                 <a:cs typeface="Calibri" pitchFamily="34" charset="-120"/>
               </a:rPr>
-              <a:t>Demonstrate CSRF still succeeds against fixed_app.py — explain why SameSite didn't stop it</a:t>
-            </a:r>
-            <a:endParaRPr lang="en-US" sz="1350" dirty="0"/>
-          </a:p>
-        </p:txBody>
-      </p:sp>
-      <p:sp>
-        <p:nvSpPr>
-          <p:cNvPr id="8" name="Text 5"/>
-          <p:cNvSpPr/>
-          <p:nvPr/>
-        </p:nvSpPr>
-        <p:spPr>
-          <a:xfrm>
-            <a:off x="457200" y="4800600"/>
-            <a:ext cx="6949440" cy="274320"/>
-          </a:xfrm>
-          <a:prstGeom prst="rect">
-            <a:avLst/>
-          </a:prstGeom>
-          <a:noFill/>
-          <a:ln/>
-        </p:spPr>
-        <p:txBody>
-          <a:bodyPr wrap="square" lIns="0" tIns="0" rIns="0" bIns="0" rtlCol="0" anchor="ctr"/>
-          <a:lstStyle/>
-          <a:p>
-            <a:pPr indent="0" marL="0">
-              <a:buNone/>
-            </a:pPr>
-            <a:r>
-              <a:rPr lang="en-US" sz="900" dirty="0">
-                <a:solidFill>
-                  <a:srgbClr val="64748B"/>
+              <a:t>Output encoding per context (HTML/attr/JS/URL)</a:t>
+            </a:r>
+            <a:endParaRPr lang="en-US" sz="1400" dirty="0"/>
+          </a:p>
+          <a:p>
+            <a:pPr marL="342900" indent="-342900">
+              <a:spcAft>
+                <a:spcPts val="600"/>
+              </a:spcAft>
+              <a:buSzPct val="100000"/>
+              <a:buChar char="•"/>
+            </a:pPr>
+            <a:r>
+              <a:rPr lang="en-US" sz="1400" dirty="0">
+                <a:solidFill>
+                  <a:srgbClr val="1F2937"/>
                 </a:solidFill>
                 <a:latin typeface="Calibri" pitchFamily="34" charset="0"/>
                 <a:ea typeface="Calibri" pitchFamily="34" charset="-122"/>
                 <a:cs typeface="Calibri" pitchFamily="34" charset="-120"/>
               </a:rPr>
+              <a:t>Framework auto-escaping (don't bypass with innerHTML/dangerouslySetInnerHTML)</a:t>
+            </a:r>
+            <a:endParaRPr lang="en-US" sz="1400" dirty="0"/>
+          </a:p>
+          <a:p>
+            <a:pPr marL="342900" indent="-342900">
+              <a:spcAft>
+                <a:spcPts val="600"/>
+              </a:spcAft>
+              <a:buSzPct val="100000"/>
+              <a:buChar char="•"/>
+            </a:pPr>
+            <a:r>
+              <a:rPr lang="en-US" sz="1400" dirty="0">
+                <a:solidFill>
+                  <a:srgbClr val="1F2937"/>
+                </a:solidFill>
+                <a:latin typeface="Calibri" pitchFamily="34" charset="0"/>
+                <a:ea typeface="Calibri" pitchFamily="34" charset="-122"/>
+                <a:cs typeface="Calibri" pitchFamily="34" charset="-120"/>
+              </a:rPr>
+              <a:t>Content Security Policy — a defense-in-depth header, set alongside escaping — it doesn't replace it</a:t>
+            </a:r>
+            <a:endParaRPr lang="en-US" sz="1400" dirty="0"/>
+          </a:p>
+          <a:p>
+            <a:pPr marL="342900" indent="-342900">
+              <a:spcAft>
+                <a:spcPts val="600"/>
+              </a:spcAft>
+              <a:buSzPct val="100000"/>
+              <a:buChar char="•"/>
+            </a:pPr>
+            <a:r>
+              <a:rPr lang="en-US" sz="1400" dirty="0">
+                <a:solidFill>
+                  <a:srgbClr val="1F2937"/>
+                </a:solidFill>
+                <a:latin typeface="Calibri" pitchFamily="34" charset="0"/>
+                <a:ea typeface="Calibri" pitchFamily="34" charset="-122"/>
+                <a:cs typeface="Calibri" pitchFamily="34" charset="-120"/>
+              </a:rPr>
+              <a:t>HttpOnly + SameSite cookies; anti-CSRF tokens and an endpoint that actually checks who's asking</a:t>
+            </a:r>
+            <a:endParaRPr lang="en-US" sz="1400" dirty="0"/>
+          </a:p>
+        </p:txBody>
+      </p:sp>
+      <p:sp>
+        <p:nvSpPr>
+          <p:cNvPr id="7" name="Text 4"/>
+          <p:cNvSpPr/>
+          <p:nvPr/>
+        </p:nvSpPr>
+        <p:spPr>
+          <a:xfrm>
+            <a:off x="457200" y="4800600"/>
+            <a:ext cx="6949440" cy="274320"/>
+          </a:xfrm>
+          <a:prstGeom prst="rect">
+            <a:avLst/>
+          </a:prstGeom>
+          <a:noFill/>
+          <a:ln/>
+        </p:spPr>
+        <p:txBody>
+          <a:bodyPr wrap="square" lIns="0" tIns="0" rIns="0" bIns="0" rtlCol="0" anchor="ctr"/>
+          <a:lstStyle/>
+          <a:p>
+            <a:pPr indent="0" marL="0">
+              <a:buNone/>
+            </a:pPr>
+            <a:r>
+              <a:rPr lang="en-US" sz="900" dirty="0">
+                <a:solidFill>
+                  <a:srgbClr val="64748B"/>
+                </a:solidFill>
+                <a:latin typeface="Calibri" pitchFamily="34" charset="0"/>
+                <a:ea typeface="Calibri" pitchFamily="34" charset="-122"/>
+                <a:cs typeface="Calibri" pitchFamily="34" charset="-120"/>
+              </a:rPr>
               <a:t>Software Security · Week 5</a:t>
             </a:r>
             <a:endParaRPr lang="en-US" sz="900" dirty="0"/>
@@ -4966,7 +4865,7 @@
       </p:sp>
       <p:pic>
         <p:nvPicPr>
-          <p:cNvPr id="9" name="Image 1" descr="/Users/pop7/Library/CloudStorage/OneDrive-MonsterConnectCo.,Ltd/Lecture/KOSEN69 - software-security/slides/pptx/assets/logo-small.png">    </p:cNvPr>
+          <p:cNvPr id="8" name="Image 1" descr="/Users/pop7/Library/CloudStorage/OneDrive-MonsterConnectCo.,Ltd/Lecture/KOSEN69 - software-security/slides/pptx/assets/logo-small.png">    </p:cNvPr>
           <p:cNvPicPr>
             <a:picLocks noChangeAspect="1"/>
           </p:cNvPicPr>
@@ -5104,7 +5003,7 @@
                 <a:ea typeface="Arial" pitchFamily="34" charset="-122"/>
                 <a:cs typeface="Arial" pitchFamily="34" charset="-120"/>
               </a:rPr>
-              <a:t>Deliverable</a:t>
+              <a:t>⛳ Game — XSS Golf</a:t>
             </a:r>
             <a:endParaRPr lang="en-US" sz="2600" dirty="0"/>
           </a:p>
@@ -5112,18 +5011,59 @@
       </p:sp>
       <p:sp>
         <p:nvSpPr>
-          <p:cNvPr id="5" name="Shape 2"/>
-          <p:cNvSpPr/>
-          <p:nvPr/>
-        </p:nvSpPr>
-        <p:spPr>
-          <a:xfrm>
-            <a:off x="457200" y="1325880"/>
-            <a:ext cx="8229600" cy="1719072"/>
+          <p:cNvPr id="5" name="Text 2"/>
+          <p:cNvSpPr/>
+          <p:nvPr/>
+        </p:nvSpPr>
+        <p:spPr>
+          <a:xfrm>
+            <a:off x="548640" y="1325880"/>
+            <a:ext cx="8046720" cy="822960"/>
+          </a:xfrm>
+          <a:prstGeom prst="rect">
+            <a:avLst/>
+          </a:prstGeom>
+          <a:noFill/>
+          <a:ln/>
+        </p:spPr>
+        <p:txBody>
+          <a:bodyPr wrap="square" lIns="0" tIns="0" rIns="0" bIns="0" rtlCol="0" anchor="t">
+            <a:normAutofit/>
+          </a:bodyPr>
+          <a:lstStyle/>
+          <a:p>
+            <a:pPr indent="0" marL="0">
+              <a:buNone/>
+            </a:pPr>
+            <a:r>
+              <a:rPr lang="en-US" sz="1400" dirty="0">
+                <a:solidFill>
+                  <a:srgbClr val="1F2937"/>
+                </a:solidFill>
+                <a:latin typeface="Calibri" pitchFamily="34" charset="0"/>
+                <a:ea typeface="Calibri" pitchFamily="34" charset="-122"/>
+                <a:cs typeface="Calibri" pitchFamily="34" charset="-120"/>
+              </a:rPr>
+              <a:t>Craft the shortest payload that pops alert(1) / steals a cookie against vulnerable_app.py.</a:t>
+            </a:r>
+            <a:endParaRPr lang="en-US" sz="1400" dirty="0"/>
+          </a:p>
+        </p:txBody>
+      </p:sp>
+      <p:sp>
+        <p:nvSpPr>
+          <p:cNvPr id="6" name="Shape 3"/>
+          <p:cNvSpPr/>
+          <p:nvPr/>
+        </p:nvSpPr>
+        <p:spPr>
+          <a:xfrm>
+            <a:off x="457200" y="2240280"/>
+            <a:ext cx="8229600" cy="1298448"/>
           </a:xfrm>
           <a:prstGeom prst="roundRect">
             <a:avLst>
-              <a:gd name="adj" fmla="val 4255"/>
+              <a:gd name="adj" fmla="val 5634"/>
             </a:avLst>
           </a:prstGeom>
           <a:solidFill>
@@ -5141,14 +5081,14 @@
       </p:sp>
       <p:sp>
         <p:nvSpPr>
-          <p:cNvPr id="6" name="Text 3"/>
-          <p:cNvSpPr/>
-          <p:nvPr/>
-        </p:nvSpPr>
-        <p:spPr>
-          <a:xfrm>
-            <a:off x="731520" y="1435608"/>
-            <a:ext cx="7680960" cy="1499616"/>
+          <p:cNvPr id="7" name="Text 4"/>
+          <p:cNvSpPr/>
+          <p:nvPr/>
+        </p:nvSpPr>
+        <p:spPr>
+          <a:xfrm>
+            <a:off x="731520" y="2350008"/>
+            <a:ext cx="7680960" cy="1078992"/>
           </a:xfrm>
           <a:prstGeom prst="rect">
             <a:avLst/>
@@ -5178,7 +5118,7 @@
                 <a:ea typeface="Calibri" pitchFamily="34" charset="-122"/>
                 <a:cs typeface="Calibri" pitchFamily="34" charset="-120"/>
               </a:rPr>
-              <a:t>Each XSS type with payload + context</a:t>
+              <a:t>Solo scoring by character count (no filter to beat — it's a golf exercise, not a bypass race)</a:t>
             </a:r>
             <a:endParaRPr lang="en-US" sz="1400" dirty="0"/>
           </a:p>
@@ -5199,87 +5139,45 @@
                 <a:ea typeface="Calibri" pitchFamily="34" charset="-122"/>
                 <a:cs typeface="Calibri" pitchFamily="34" charset="-120"/>
               </a:rPr>
-              <a:t>Escaping + CSP that blocks them (show before/after)</a:t>
+              <a:t>Defend: run fixed_app.py — same payloads, now escaped — then prove CSRF still works against it and explain why</a:t>
             </a:r>
             <a:endParaRPr lang="en-US" sz="1400" dirty="0"/>
           </a:p>
-          <a:p>
-            <a:pPr marL="342900" indent="-342900">
-              <a:spcAft>
-                <a:spcPts val="600"/>
-              </a:spcAft>
-              <a:buSzPct val="100000"/>
-              <a:buChar char="•"/>
-            </a:pPr>
-            <a:r>
-              <a:rPr lang="en-US" sz="1400" dirty="0">
-                <a:solidFill>
-                  <a:srgbClr val="1F2937"/>
+        </p:txBody>
+      </p:sp>
+      <p:sp>
+        <p:nvSpPr>
+          <p:cNvPr id="8" name="Text 5"/>
+          <p:cNvSpPr/>
+          <p:nvPr/>
+        </p:nvSpPr>
+        <p:spPr>
+          <a:xfrm>
+            <a:off x="457200" y="4800600"/>
+            <a:ext cx="6949440" cy="274320"/>
+          </a:xfrm>
+          <a:prstGeom prst="rect">
+            <a:avLst/>
+          </a:prstGeom>
+          <a:noFill/>
+          <a:ln/>
+        </p:spPr>
+        <p:txBody>
+          <a:bodyPr wrap="square" lIns="0" tIns="0" rIns="0" bIns="0" rtlCol="0" anchor="ctr"/>
+          <a:lstStyle/>
+          <a:p>
+            <a:pPr indent="0" marL="0">
+              <a:buNone/>
+            </a:pPr>
+            <a:r>
+              <a:rPr lang="en-US" sz="900" dirty="0">
+                <a:solidFill>
+                  <a:srgbClr val="64748B"/>
                 </a:solidFill>
                 <a:latin typeface="Calibri" pitchFamily="34" charset="0"/>
                 <a:ea typeface="Calibri" pitchFamily="34" charset="-122"/>
                 <a:cs typeface="Calibri" pitchFamily="34" charset="-120"/>
               </a:rPr>
-              <a:t>Short note: why CSRF still succeeds against fixed_app.py despite SameSite=Strict</a:t>
-            </a:r>
-            <a:endParaRPr lang="en-US" sz="1400" dirty="0"/>
-          </a:p>
-          <a:p>
-            <a:pPr marL="342900" indent="-342900">
-              <a:spcAft>
-                <a:spcPts val="600"/>
-              </a:spcAft>
-              <a:buSzPct val="100000"/>
-              <a:buChar char="•"/>
-            </a:pPr>
-            <a:r>
-              <a:rPr lang="en-US" sz="1400" dirty="0">
-                <a:solidFill>
-                  <a:srgbClr val="1F2937"/>
-                </a:solidFill>
-                <a:latin typeface="Calibri" pitchFamily="34" charset="0"/>
-                <a:ea typeface="Calibri" pitchFamily="34" charset="-122"/>
-                <a:cs typeface="Calibri" pitchFamily="34" charset="-120"/>
-              </a:rPr>
-              <a:t>+ Audit the AI / EiPE / Prompt Problem (see worksheet)</a:t>
-            </a:r>
-            <a:endParaRPr lang="en-US" sz="1400" dirty="0"/>
-          </a:p>
-        </p:txBody>
-      </p:sp>
-      <p:sp>
-        <p:nvSpPr>
-          <p:cNvPr id="7" name="Text 4"/>
-          <p:cNvSpPr/>
-          <p:nvPr/>
-        </p:nvSpPr>
-        <p:spPr>
-          <a:xfrm>
-            <a:off x="457200" y="4800600"/>
-            <a:ext cx="6949440" cy="274320"/>
-          </a:xfrm>
-          <a:prstGeom prst="rect">
-            <a:avLst/>
-          </a:prstGeom>
-          <a:noFill/>
-          <a:ln/>
-        </p:spPr>
-        <p:txBody>
-          <a:bodyPr wrap="square" lIns="0" tIns="0" rIns="0" bIns="0" rtlCol="0" anchor="ctr"/>
-          <a:lstStyle/>
-          <a:p>
-            <a:pPr indent="0" marL="0">
-              <a:buNone/>
-            </a:pPr>
-            <a:r>
-              <a:rPr lang="en-US" sz="900" dirty="0">
-                <a:solidFill>
-                  <a:srgbClr val="64748B"/>
-                </a:solidFill>
-                <a:latin typeface="Calibri" pitchFamily="34" charset="0"/>
-                <a:ea typeface="Calibri" pitchFamily="34" charset="-122"/>
-                <a:cs typeface="Calibri" pitchFamily="34" charset="-120"/>
-              </a:rPr>
               <a:t>Software Security · Week 5</a:t>
             </a:r>
             <a:endParaRPr lang="en-US" sz="900" dirty="0"/>
@@ -5288,7 +5186,7 @@
       </p:sp>
       <p:pic>
         <p:nvPicPr>
-          <p:cNvPr id="8" name="Image 1" descr="/Users/pop7/Library/CloudStorage/OneDrive-MonsterConnectCo.,Ltd/Lecture/KOSEN69 - software-security/slides/pptx/assets/logo-small.png">    </p:cNvPr>
+          <p:cNvPr id="9" name="Image 1" descr="/Users/pop7/Library/CloudStorage/OneDrive-MonsterConnectCo.,Ltd/Lecture/KOSEN69 - software-security/slides/pptx/assets/logo-small.png">    </p:cNvPr>
           <p:cNvPicPr>
             <a:picLocks noChangeAspect="1"/>
           </p:cNvPicPr>
@@ -5426,7 +5324,7 @@
                 <a:ea typeface="Arial" pitchFamily="34" charset="-122"/>
                 <a:cs typeface="Arial" pitchFamily="34" charset="-120"/>
               </a:rPr>
-              <a:t>Key takeaways</a:t>
+              <a:t>Lab steps</a:t>
             </a:r>
             <a:endParaRPr lang="en-US" sz="2600" dirty="0"/>
           </a:p>
@@ -5441,24 +5339,17 @@
         <p:spPr>
           <a:xfrm>
             <a:off x="457200" y="1325880"/>
-            <a:ext cx="8229600" cy="1408176"/>
+            <a:ext cx="8229600" cy="822960"/>
           </a:xfrm>
           <a:prstGeom prst="roundRect">
             <a:avLst>
-              <a:gd name="adj" fmla="val 5195"/>
+              <a:gd name="adj" fmla="val 8889"/>
             </a:avLst>
           </a:prstGeom>
           <a:solidFill>
-            <a:srgbClr val="F1F5F9"/>
+            <a:srgbClr val="E8EDF3"/>
           </a:solidFill>
           <a:ln/>
-          <a:effectLst>
-            <a:outerShdw sx="100000" sy="100000" kx="0" ky="0" algn="bl" rotWithShape="0" blurRad="76200" dist="25400" dir="5400000">
-              <a:srgbClr val="000000">
-                <a:alpha val="12000"/>
-              </a:srgbClr>
-            </a:outerShdw>
-          </a:effectLst>
         </p:spPr>
       </p:sp>
       <p:sp>
@@ -5469,8 +5360,8 @@
         </p:nvSpPr>
         <p:spPr>
           <a:xfrm>
-            <a:off x="731520" y="1435608"/>
-            <a:ext cx="7680960" cy="1188720"/>
+            <a:off x="731520" y="1325880"/>
+            <a:ext cx="7680960" cy="822960"/>
           </a:xfrm>
           <a:prstGeom prst="rect">
             <a:avLst/>
@@ -5479,41 +5370,116 @@
           <a:ln/>
         </p:spPr>
         <p:txBody>
-          <a:bodyPr wrap="square" lIns="0" tIns="0" rIns="0" bIns="0" rtlCol="0" anchor="t">
+          <a:bodyPr wrap="square" lIns="0" tIns="0" rIns="0" bIns="0" rtlCol="0" anchor="ctr">
             <a:normAutofit/>
           </a:bodyPr>
           <a:lstStyle/>
           <a:p>
-            <a:pPr marL="342900" indent="-342900">
-              <a:spcAft>
-                <a:spcPts val="600"/>
-              </a:spcAft>
-              <a:buSzPct val="100000"/>
-              <a:buChar char="•"/>
-            </a:pPr>
-            <a:r>
-              <a:rPr lang="en-US" sz="1400" dirty="0">
-                <a:solidFill>
-                  <a:srgbClr val="1F2937"/>
+            <a:pPr indent="0" marL="0">
+              <a:buNone/>
+            </a:pPr>
+            <a:r>
+              <a:rPr lang="en-US" sz="1400" i="1" dirty="0">
+                <a:solidFill>
+                  <a:srgbClr val="E35205"/>
                 </a:solidFill>
                 <a:latin typeface="Calibri" pitchFamily="34" charset="0"/>
                 <a:ea typeface="Calibri" pitchFamily="34" charset="-122"/>
                 <a:cs typeface="Calibri" pitchFamily="34" charset="-120"/>
               </a:rPr>
-              <a:t>XSS is injection on the output side — encode for the context</a:t>
+              <a:t>📋 Worksheet 5 — labs/week05-xss-client-side/worksheet.md (Part 3) · kickoff: docker compose up → http://localhost:8080</a:t>
             </a:r>
             <a:endParaRPr lang="en-US" sz="1400" dirty="0"/>
           </a:p>
-          <a:p>
-            <a:pPr marL="342900" indent="-342900">
-              <a:spcAft>
-                <a:spcPts val="600"/>
-              </a:spcAft>
-              <a:buSzPct val="100000"/>
-              <a:buChar char="•"/>
-            </a:pPr>
-            <a:r>
-              <a:rPr lang="en-US" sz="1400" dirty="0">
+        </p:txBody>
+      </p:sp>
+      <p:sp>
+        <p:nvSpPr>
+          <p:cNvPr id="7" name="Shape 4"/>
+          <p:cNvSpPr/>
+          <p:nvPr/>
+        </p:nvSpPr>
+        <p:spPr>
+          <a:xfrm>
+            <a:off x="502920" y="2313432"/>
+            <a:ext cx="384048" cy="384048"/>
+          </a:xfrm>
+          <a:prstGeom prst="ellipse">
+            <a:avLst/>
+          </a:prstGeom>
+          <a:solidFill>
+            <a:srgbClr val="E35205"/>
+          </a:solidFill>
+          <a:ln/>
+        </p:spPr>
+      </p:sp>
+      <p:sp>
+        <p:nvSpPr>
+          <p:cNvPr id="8" name="Text 5"/>
+          <p:cNvSpPr/>
+          <p:nvPr/>
+        </p:nvSpPr>
+        <p:spPr>
+          <a:xfrm>
+            <a:off x="502920" y="2313432"/>
+            <a:ext cx="384048" cy="384048"/>
+          </a:xfrm>
+          <a:prstGeom prst="rect">
+            <a:avLst/>
+          </a:prstGeom>
+          <a:noFill/>
+          <a:ln/>
+        </p:spPr>
+        <p:txBody>
+          <a:bodyPr wrap="square" lIns="0" tIns="0" rIns="0" bIns="0" rtlCol="0" anchor="ctr"/>
+          <a:lstStyle/>
+          <a:p>
+            <a:pPr algn="ctr" indent="0" marL="0">
+              <a:buNone/>
+            </a:pPr>
+            <a:r>
+              <a:rPr lang="en-US" sz="1500" b="1" dirty="0">
+                <a:solidFill>
+                  <a:srgbClr val="0E1726"/>
+                </a:solidFill>
+                <a:latin typeface="Arial" pitchFamily="34" charset="0"/>
+                <a:ea typeface="Arial" pitchFamily="34" charset="-122"/>
+                <a:cs typeface="Arial" pitchFamily="34" charset="-120"/>
+              </a:rPr>
+              <a:t>1</a:t>
+            </a:r>
+            <a:endParaRPr lang="en-US" sz="1500" dirty="0"/>
+          </a:p>
+        </p:txBody>
+      </p:sp>
+      <p:sp>
+        <p:nvSpPr>
+          <p:cNvPr id="9" name="Text 6"/>
+          <p:cNvSpPr/>
+          <p:nvPr/>
+        </p:nvSpPr>
+        <p:spPr>
+          <a:xfrm>
+            <a:off x="1051560" y="2313432"/>
+            <a:ext cx="7589520" cy="658368"/>
+          </a:xfrm>
+          <a:prstGeom prst="rect">
+            <a:avLst/>
+          </a:prstGeom>
+          <a:noFill/>
+          <a:ln/>
+        </p:spPr>
+        <p:txBody>
+          <a:bodyPr wrap="square" lIns="0" tIns="0" rIns="0" bIns="0" rtlCol="0" anchor="ctr">
+            <a:normAutofit/>
+          </a:bodyPr>
+          <a:lstStyle/>
+          <a:p>
+            <a:pPr indent="0" marL="0">
+              <a:buNone/>
+            </a:pPr>
+            <a:r>
+              <a:rPr lang="en-US" sz="1350" dirty="0">
                 <a:solidFill>
                   <a:srgbClr val="1F2937"/>
                 </a:solidFill>
@@ -5521,20 +5487,99 @@
                 <a:ea typeface="Calibri" pitchFamily="34" charset="-122"/>
                 <a:cs typeface="Calibri" pitchFamily="34" charset="-120"/>
               </a:rPr>
-              <a:t>CSP is defense-in-depth, not a substitute for encoding</a:t>
-            </a:r>
-            <a:endParaRPr lang="en-US" sz="1400" dirty="0"/>
-          </a:p>
-          <a:p>
-            <a:pPr marL="342900" indent="-342900">
-              <a:spcAft>
-                <a:spcPts val="600"/>
-              </a:spcAft>
-              <a:buSzPct val="100000"/>
-              <a:buChar char="•"/>
-            </a:pPr>
-            <a:r>
-              <a:rPr lang="en-US" sz="1400" dirty="0">
+              <a:t>Find reflected + stored XSS in vulnerable_app.py (DOM XSS via Juice Shop is optional/ungraded)</a:t>
+            </a:r>
+            <a:endParaRPr lang="en-US" sz="1350" dirty="0"/>
+          </a:p>
+        </p:txBody>
+      </p:sp>
+      <p:sp>
+        <p:nvSpPr>
+          <p:cNvPr id="10" name="Shape 7"/>
+          <p:cNvSpPr/>
+          <p:nvPr/>
+        </p:nvSpPr>
+        <p:spPr>
+          <a:xfrm>
+            <a:off x="502920" y="3044952"/>
+            <a:ext cx="384048" cy="384048"/>
+          </a:xfrm>
+          <a:prstGeom prst="ellipse">
+            <a:avLst/>
+          </a:prstGeom>
+          <a:solidFill>
+            <a:srgbClr val="E35205"/>
+          </a:solidFill>
+          <a:ln/>
+        </p:spPr>
+      </p:sp>
+      <p:sp>
+        <p:nvSpPr>
+          <p:cNvPr id="11" name="Text 8"/>
+          <p:cNvSpPr/>
+          <p:nvPr/>
+        </p:nvSpPr>
+        <p:spPr>
+          <a:xfrm>
+            <a:off x="502920" y="3044952"/>
+            <a:ext cx="384048" cy="384048"/>
+          </a:xfrm>
+          <a:prstGeom prst="rect">
+            <a:avLst/>
+          </a:prstGeom>
+          <a:noFill/>
+          <a:ln/>
+        </p:spPr>
+        <p:txBody>
+          <a:bodyPr wrap="square" lIns="0" tIns="0" rIns="0" bIns="0" rtlCol="0" anchor="ctr"/>
+          <a:lstStyle/>
+          <a:p>
+            <a:pPr algn="ctr" indent="0" marL="0">
+              <a:buNone/>
+            </a:pPr>
+            <a:r>
+              <a:rPr lang="en-US" sz="1500" b="1" dirty="0">
+                <a:solidFill>
+                  <a:srgbClr val="0E1726"/>
+                </a:solidFill>
+                <a:latin typeface="Arial" pitchFamily="34" charset="0"/>
+                <a:ea typeface="Arial" pitchFamily="34" charset="-122"/>
+                <a:cs typeface="Arial" pitchFamily="34" charset="-120"/>
+              </a:rPr>
+              <a:t>2</a:t>
+            </a:r>
+            <a:endParaRPr lang="en-US" sz="1500" dirty="0"/>
+          </a:p>
+        </p:txBody>
+      </p:sp>
+      <p:sp>
+        <p:nvSpPr>
+          <p:cNvPr id="12" name="Text 9"/>
+          <p:cNvSpPr/>
+          <p:nvPr/>
+        </p:nvSpPr>
+        <p:spPr>
+          <a:xfrm>
+            <a:off x="1051560" y="3044952"/>
+            <a:ext cx="7589520" cy="402336"/>
+          </a:xfrm>
+          <a:prstGeom prst="rect">
+            <a:avLst/>
+          </a:prstGeom>
+          <a:noFill/>
+          <a:ln/>
+        </p:spPr>
+        <p:txBody>
+          <a:bodyPr wrap="square" lIns="0" tIns="0" rIns="0" bIns="0" rtlCol="0" anchor="ctr">
+            <a:normAutofit/>
+          </a:bodyPr>
+          <a:lstStyle/>
+          <a:p>
+            <a:pPr indent="0" marL="0">
+              <a:buNone/>
+            </a:pPr>
+            <a:r>
+              <a:rPr lang="en-US" sz="1350" dirty="0">
                 <a:solidFill>
                   <a:srgbClr val="1F2937"/>
                 </a:solidFill>
@@ -5542,22 +5587,42 @@
                 <a:ea typeface="Calibri" pitchFamily="34" charset="-122"/>
                 <a:cs typeface="Calibri" pitchFamily="34" charset="-120"/>
               </a:rPr>
-              <a:t>SameSite cookies stop the cookie attaching cross-site — they don't stop a request being accepted if the endpoint never checks authorization</a:t>
-            </a:r>
-            <a:endParaRPr lang="en-US" sz="1400" dirty="0"/>
-          </a:p>
-        </p:txBody>
-      </p:sp>
-      <p:sp>
-        <p:nvSpPr>
-          <p:cNvPr id="7" name="Text 4"/>
-          <p:cNvSpPr/>
-          <p:nvPr/>
-        </p:nvSpPr>
-        <p:spPr>
-          <a:xfrm>
-            <a:off x="457200" y="4800600"/>
-            <a:ext cx="6949440" cy="274320"/>
+              <a:t>Demonstrate cookie theft via the stored payload</a:t>
+            </a:r>
+            <a:endParaRPr lang="en-US" sz="1350" dirty="0"/>
+          </a:p>
+        </p:txBody>
+      </p:sp>
+      <p:sp>
+        <p:nvSpPr>
+          <p:cNvPr id="13" name="Shape 10"/>
+          <p:cNvSpPr/>
+          <p:nvPr/>
+        </p:nvSpPr>
+        <p:spPr>
+          <a:xfrm>
+            <a:off x="502920" y="3520440"/>
+            <a:ext cx="384048" cy="384048"/>
+          </a:xfrm>
+          <a:prstGeom prst="ellipse">
+            <a:avLst/>
+          </a:prstGeom>
+          <a:solidFill>
+            <a:srgbClr val="E35205"/>
+          </a:solidFill>
+          <a:ln/>
+        </p:spPr>
+      </p:sp>
+      <p:sp>
+        <p:nvSpPr>
+          <p:cNvPr id="14" name="Text 11"/>
+          <p:cNvSpPr/>
+          <p:nvPr/>
+        </p:nvSpPr>
+        <p:spPr>
+          <a:xfrm>
+            <a:off x="502920" y="3520440"/>
+            <a:ext cx="384048" cy="384048"/>
           </a:xfrm>
           <a:prstGeom prst="rect">
             <a:avLst/>
@@ -5567,20 +5632,100 @@
         </p:spPr>
         <p:txBody>
           <a:bodyPr wrap="square" lIns="0" tIns="0" rIns="0" bIns="0" rtlCol="0" anchor="ctr"/>
+          <a:lstStyle/>
+          <a:p>
+            <a:pPr algn="ctr" indent="0" marL="0">
+              <a:buNone/>
+            </a:pPr>
+            <a:r>
+              <a:rPr lang="en-US" sz="1500" b="1" dirty="0">
+                <a:solidFill>
+                  <a:srgbClr val="0E1726"/>
+                </a:solidFill>
+                <a:latin typeface="Arial" pitchFamily="34" charset="0"/>
+                <a:ea typeface="Arial" pitchFamily="34" charset="-122"/>
+                <a:cs typeface="Arial" pitchFamily="34" charset="-120"/>
+              </a:rPr>
+              <a:t>3</a:t>
+            </a:r>
+            <a:endParaRPr lang="en-US" sz="1500" dirty="0"/>
+          </a:p>
+        </p:txBody>
+      </p:sp>
+      <p:sp>
+        <p:nvSpPr>
+          <p:cNvPr id="15" name="Text 12"/>
+          <p:cNvSpPr/>
+          <p:nvPr/>
+        </p:nvSpPr>
+        <p:spPr>
+          <a:xfrm>
+            <a:off x="1051560" y="3520440"/>
+            <a:ext cx="7589520" cy="402336"/>
+          </a:xfrm>
+          <a:prstGeom prst="rect">
+            <a:avLst/>
+          </a:prstGeom>
+          <a:noFill/>
+          <a:ln/>
+        </p:spPr>
+        <p:txBody>
+          <a:bodyPr wrap="square" lIns="0" tIns="0" rIns="0" bIns="0" rtlCol="0" anchor="ctr">
+            <a:normAutofit/>
+          </a:bodyPr>
           <a:lstStyle/>
           <a:p>
             <a:pPr indent="0" marL="0">
               <a:buNone/>
             </a:pPr>
             <a:r>
-              <a:rPr lang="en-US" sz="900" dirty="0">
-                <a:solidFill>
-                  <a:srgbClr val="64748B"/>
+              <a:rPr lang="en-US" sz="1350" dirty="0">
+                <a:solidFill>
+                  <a:srgbClr val="1F2937"/>
                 </a:solidFill>
                 <a:latin typeface="Calibri" pitchFamily="34" charset="0"/>
                 <a:ea typeface="Calibri" pitchFamily="34" charset="-122"/>
                 <a:cs typeface="Calibri" pitchFamily="34" charset="-120"/>
               </a:rPr>
+              <a:t>Run fixed_app.py — confirm output encoding + CSP now block your XSS payloads</a:t>
+            </a:r>
+            <a:endParaRPr lang="en-US" sz="1350" dirty="0"/>
+          </a:p>
+        </p:txBody>
+      </p:sp>
+      <p:sp>
+        <p:nvSpPr>
+          <p:cNvPr id="16" name="Text 13"/>
+          <p:cNvSpPr/>
+          <p:nvPr/>
+        </p:nvSpPr>
+        <p:spPr>
+          <a:xfrm>
+            <a:off x="457200" y="4800600"/>
+            <a:ext cx="6949440" cy="274320"/>
+          </a:xfrm>
+          <a:prstGeom prst="rect">
+            <a:avLst/>
+          </a:prstGeom>
+          <a:noFill/>
+          <a:ln/>
+        </p:spPr>
+        <p:txBody>
+          <a:bodyPr wrap="square" lIns="0" tIns="0" rIns="0" bIns="0" rtlCol="0" anchor="ctr"/>
+          <a:lstStyle/>
+          <a:p>
+            <a:pPr indent="0" marL="0">
+              <a:buNone/>
+            </a:pPr>
+            <a:r>
+              <a:rPr lang="en-US" sz="900" dirty="0">
+                <a:solidFill>
+                  <a:srgbClr val="64748B"/>
+                </a:solidFill>
+                <a:latin typeface="Calibri" pitchFamily="34" charset="0"/>
+                <a:ea typeface="Calibri" pitchFamily="34" charset="-122"/>
+                <a:cs typeface="Calibri" pitchFamily="34" charset="-120"/>
+              </a:rPr>
               <a:t>Software Security · Week 5</a:t>
             </a:r>
             <a:endParaRPr lang="en-US" sz="900" dirty="0"/>
@@ -5589,7 +5734,7 @@
       </p:sp>
       <p:pic>
         <p:nvPicPr>
-          <p:cNvPr id="8" name="Image 1" descr="/Users/pop7/Library/CloudStorage/OneDrive-MonsterConnectCo.,Ltd/Lecture/KOSEN69 - software-security/slides/pptx/assets/logo-small.png">    </p:cNvPr>
+          <p:cNvPr id="17" name="Image 1" descr="/Users/pop7/Library/CloudStorage/OneDrive-MonsterConnectCo.,Ltd/Lecture/KOSEN69 - software-security/slides/pptx/assets/logo-small.png">    </p:cNvPr>
           <p:cNvPicPr>
             <a:picLocks noChangeAspect="1"/>
           </p:cNvPicPr>
@@ -5645,14 +5790,65 @@
       </p:grpSpPr>
       <p:sp>
         <p:nvSpPr>
-          <p:cNvPr id="2" name="Text 0"/>
-          <p:cNvSpPr/>
-          <p:nvPr/>
-        </p:nvSpPr>
-        <p:spPr>
-          <a:xfrm>
-            <a:off x="640080" y="1737360"/>
-            <a:ext cx="7863840" cy="1097280"/>
+          <p:cNvPr id="2" name="Shape 0"/>
+          <p:cNvSpPr/>
+          <p:nvPr/>
+        </p:nvSpPr>
+        <p:spPr>
+          <a:xfrm>
+            <a:off x="457200" y="384048"/>
+            <a:ext cx="530352" cy="530352"/>
+          </a:xfrm>
+          <a:prstGeom prst="ellipse">
+            <a:avLst/>
+          </a:prstGeom>
+          <a:solidFill>
+            <a:srgbClr val="E35205"/>
+          </a:solidFill>
+          <a:ln/>
+          <a:effectLst>
+            <a:outerShdw sx="100000" sy="100000" kx="0" ky="0" algn="bl" rotWithShape="0" blurRad="76200" dist="25400" dir="5400000">
+              <a:srgbClr val="000000">
+                <a:alpha val="12000"/>
+              </a:srgbClr>
+            </a:outerShdw>
+          </a:effectLst>
+        </p:spPr>
+      </p:sp>
+      <p:pic>
+        <p:nvPicPr>
+          <p:cNvPr id="3" name="Image 0" descr="preencoded.png">    </p:cNvPr>
+          <p:cNvPicPr>
+            <a:picLocks noChangeAspect="1"/>
+          </p:cNvPicPr>
+          <p:nvPr/>
+        </p:nvPicPr>
+        <p:blipFill>
+          <a:blip r:embed="rId1"/>
+          <a:stretch>
+            <a:fillRect/>
+          </a:stretch>
+        </p:blipFill>
+        <p:spPr>
+          <a:xfrm>
+            <a:off x="594360" y="521208"/>
+            <a:ext cx="256032" cy="256032"/>
+          </a:xfrm>
+          <a:prstGeom prst="rect">
+            <a:avLst/>
+          </a:prstGeom>
+        </p:spPr>
+      </p:pic>
+      <p:sp>
+        <p:nvSpPr>
+          <p:cNvPr id="4" name="Text 1"/>
+          <p:cNvSpPr/>
+          <p:nvPr/>
+        </p:nvSpPr>
+        <p:spPr>
+          <a:xfrm>
+            <a:off x="1143000" y="329184"/>
+            <a:ext cx="7498080" cy="603504"/>
           </a:xfrm>
           <a:prstGeom prst="rect">
             <a:avLst/>
@@ -5668,7 +5864,7 @@
               <a:buNone/>
             </a:pPr>
             <a:r>
-              <a:rPr lang="en-US" sz="4600" b="1" dirty="0">
+              <a:rPr lang="en-US" sz="2600" b="1" dirty="0">
                 <a:solidFill>
                   <a:srgbClr val="1F2937"/>
                 </a:solidFill>
@@ -5676,22 +5872,42 @@
                 <a:ea typeface="Arial" pitchFamily="34" charset="-122"/>
                 <a:cs typeface="Arial" pitchFamily="34" charset="-120"/>
               </a:rPr>
-              <a:t>Questions?</a:t>
-            </a:r>
-            <a:endParaRPr lang="en-US" sz="4600" dirty="0"/>
-          </a:p>
-        </p:txBody>
-      </p:sp>
-      <p:sp>
-        <p:nvSpPr>
-          <p:cNvPr id="3" name="Text 1"/>
-          <p:cNvSpPr/>
-          <p:nvPr/>
-        </p:nvSpPr>
-        <p:spPr>
-          <a:xfrm>
-            <a:off x="658368" y="2834640"/>
-            <a:ext cx="7863840" cy="731520"/>
+              <a:t>Lab steps (cont.)</a:t>
+            </a:r>
+            <a:endParaRPr lang="en-US" sz="2600" dirty="0"/>
+          </a:p>
+        </p:txBody>
+      </p:sp>
+      <p:sp>
+        <p:nvSpPr>
+          <p:cNvPr id="5" name="Shape 2"/>
+          <p:cNvSpPr/>
+          <p:nvPr/>
+        </p:nvSpPr>
+        <p:spPr>
+          <a:xfrm>
+            <a:off x="502920" y="1325880"/>
+            <a:ext cx="384048" cy="384048"/>
+          </a:xfrm>
+          <a:prstGeom prst="ellipse">
+            <a:avLst/>
+          </a:prstGeom>
+          <a:solidFill>
+            <a:srgbClr val="E35205"/>
+          </a:solidFill>
+          <a:ln/>
+        </p:spPr>
+      </p:sp>
+      <p:sp>
+        <p:nvSpPr>
+          <p:cNvPr id="6" name="Text 3"/>
+          <p:cNvSpPr/>
+          <p:nvPr/>
+        </p:nvSpPr>
+        <p:spPr>
+          <a:xfrm>
+            <a:off x="502920" y="1325880"/>
+            <a:ext cx="384048" cy="384048"/>
           </a:xfrm>
           <a:prstGeom prst="rect">
             <a:avLst/>
@@ -5701,36 +5917,116 @@
         </p:spPr>
         <p:txBody>
           <a:bodyPr wrap="square" lIns="0" tIns="0" rIns="0" bIns="0" rtlCol="0" anchor="ctr"/>
+          <a:lstStyle/>
+          <a:p>
+            <a:pPr algn="ctr" indent="0" marL="0">
+              <a:buNone/>
+            </a:pPr>
+            <a:r>
+              <a:rPr lang="en-US" sz="1500" b="1" dirty="0">
+                <a:solidFill>
+                  <a:srgbClr val="0E1726"/>
+                </a:solidFill>
+                <a:latin typeface="Arial" pitchFamily="34" charset="0"/>
+                <a:ea typeface="Arial" pitchFamily="34" charset="-122"/>
+                <a:cs typeface="Arial" pitchFamily="34" charset="-120"/>
+              </a:rPr>
+              <a:t>4</a:t>
+            </a:r>
+            <a:endParaRPr lang="en-US" sz="1500" dirty="0"/>
+          </a:p>
+        </p:txBody>
+      </p:sp>
+      <p:sp>
+        <p:nvSpPr>
+          <p:cNvPr id="7" name="Text 4"/>
+          <p:cNvSpPr/>
+          <p:nvPr/>
+        </p:nvSpPr>
+        <p:spPr>
+          <a:xfrm>
+            <a:off x="1051560" y="1325880"/>
+            <a:ext cx="7589520" cy="658368"/>
+          </a:xfrm>
+          <a:prstGeom prst="rect">
+            <a:avLst/>
+          </a:prstGeom>
+          <a:noFill/>
+          <a:ln/>
+        </p:spPr>
+        <p:txBody>
+          <a:bodyPr wrap="square" lIns="0" tIns="0" rIns="0" bIns="0" rtlCol="0" anchor="ctr">
+            <a:normAutofit/>
+          </a:bodyPr>
           <a:lstStyle/>
           <a:p>
             <a:pPr indent="0" marL="0">
               <a:buNone/>
             </a:pPr>
             <a:r>
-              <a:rPr lang="en-US" sz="1800" dirty="0">
-                <a:solidFill>
-                  <a:srgbClr val="E35205"/>
+              <a:rPr lang="en-US" sz="1350" dirty="0">
+                <a:solidFill>
+                  <a:srgbClr val="1F2937"/>
                 </a:solidFill>
                 <a:latin typeface="Calibri" pitchFamily="34" charset="0"/>
                 <a:ea typeface="Calibri" pitchFamily="34" charset="-122"/>
                 <a:cs typeface="Calibri" pitchFamily="34" charset="-120"/>
               </a:rPr>
-              <a:t>Next week: Authentication, sessions &amp; access control</a:t>
-            </a:r>
-            <a:endParaRPr lang="en-US" sz="1800" dirty="0"/>
+              <a:t>Demonstrate CSRF still succeeds against fixed_app.py — explain why SameSite didn't stop it</a:t>
+            </a:r>
+            <a:endParaRPr lang="en-US" sz="1350" dirty="0"/>
+          </a:p>
+        </p:txBody>
+      </p:sp>
+      <p:sp>
+        <p:nvSpPr>
+          <p:cNvPr id="8" name="Text 5"/>
+          <p:cNvSpPr/>
+          <p:nvPr/>
+        </p:nvSpPr>
+        <p:spPr>
+          <a:xfrm>
+            <a:off x="457200" y="4800600"/>
+            <a:ext cx="6949440" cy="274320"/>
+          </a:xfrm>
+          <a:prstGeom prst="rect">
+            <a:avLst/>
+          </a:prstGeom>
+          <a:noFill/>
+          <a:ln/>
+        </p:spPr>
+        <p:txBody>
+          <a:bodyPr wrap="square" lIns="0" tIns="0" rIns="0" bIns="0" rtlCol="0" anchor="ctr"/>
+          <a:lstStyle/>
+          <a:p>
+            <a:pPr indent="0" marL="0">
+              <a:buNone/>
+            </a:pPr>
+            <a:r>
+              <a:rPr lang="en-US" sz="900" dirty="0">
+                <a:solidFill>
+                  <a:srgbClr val="64748B"/>
+                </a:solidFill>
+                <a:latin typeface="Calibri" pitchFamily="34" charset="0"/>
+                <a:ea typeface="Calibri" pitchFamily="34" charset="-122"/>
+                <a:cs typeface="Calibri" pitchFamily="34" charset="-120"/>
+              </a:rPr>
+              <a:t>Software Security · Week 5</a:t>
+            </a:r>
+            <a:endParaRPr lang="en-US" sz="900" dirty="0"/>
           </a:p>
         </p:txBody>
       </p:sp>
       <p:pic>
         <p:nvPicPr>
-          <p:cNvPr id="4" name="Image 0" descr="/Users/pop7/Library/CloudStorage/OneDrive-MonsterConnectCo.,Ltd/Lecture/KOSEN69 - software-security/slides/pptx/assets/logo-small.png">    </p:cNvPr>
+          <p:cNvPr id="9" name="Image 1" descr="/Users/pop7/Library/CloudStorage/OneDrive-MonsterConnectCo.,Ltd/Lecture/KOSEN69 - software-security/slides/pptx/assets/logo-small.png">    </p:cNvPr>
           <p:cNvPicPr>
             <a:picLocks noChangeAspect="1"/>
           </p:cNvPicPr>
           <p:nvPr/>
         </p:nvPicPr>
         <p:blipFill>
-          <a:blip r:embed="rId1"/>
+          <a:blip r:embed="rId2"/>
           <a:stretch>
             <a:fillRect/>
           </a:stretch>
@@ -6074,6 +6370,763 @@
         </p:nvPicPr>
         <p:blipFill>
           <a:blip r:embed="rId2"/>
+          <a:stretch>
+            <a:fillRect/>
+          </a:stretch>
+        </p:blipFill>
+        <p:spPr>
+          <a:xfrm>
+            <a:off x="7882128" y="4700016"/>
+            <a:ext cx="768096" cy="356616"/>
+          </a:xfrm>
+          <a:prstGeom prst="rect">
+            <a:avLst/>
+          </a:prstGeom>
+        </p:spPr>
+      </p:pic>
+    </p:spTree>
+  </p:cSld>
+  <p:clrMapOvr>
+    <a:masterClrMapping/>
+  </p:clrMapOvr>
+</p:sld>
+</file>
+
+<file path=ppt/slides/slide20.xml><?xml version="1.0" encoding="utf-8"?>
+<p:sld xmlns:a="http://schemas.openxmlformats.org/drawingml/2006/main" xmlns:r="http://schemas.openxmlformats.org/officeDocument/2006/relationships" xmlns:p="http://schemas.openxmlformats.org/presentationml/2006/main">
+  <p:cSld name="Slide 20">
+    <p:bg>
+      <p:bgPr>
+        <a:solidFill>
+          <a:srgbClr val="FFFFFF"/>
+        </a:solidFill>
+      </p:bgPr>
+    </p:bg>
+    <p:spTree>
+      <p:nvGrpSpPr>
+        <p:cNvPr id="1" name=""/>
+        <p:cNvGrpSpPr/>
+        <p:nvPr/>
+      </p:nvGrpSpPr>
+      <p:grpSpPr>
+        <a:xfrm>
+          <a:off x="0" y="0"/>
+          <a:ext cx="0" cy="0"/>
+          <a:chOff x="0" y="0"/>
+          <a:chExt cx="0" cy="0"/>
+        </a:xfrm>
+      </p:grpSpPr>
+      <p:sp>
+        <p:nvSpPr>
+          <p:cNvPr id="2" name="Shape 0"/>
+          <p:cNvSpPr/>
+          <p:nvPr/>
+        </p:nvSpPr>
+        <p:spPr>
+          <a:xfrm>
+            <a:off x="457200" y="384048"/>
+            <a:ext cx="530352" cy="530352"/>
+          </a:xfrm>
+          <a:prstGeom prst="ellipse">
+            <a:avLst/>
+          </a:prstGeom>
+          <a:solidFill>
+            <a:srgbClr val="E35205"/>
+          </a:solidFill>
+          <a:ln/>
+          <a:effectLst>
+            <a:outerShdw sx="100000" sy="100000" kx="0" ky="0" algn="bl" rotWithShape="0" blurRad="76200" dist="25400" dir="5400000">
+              <a:srgbClr val="000000">
+                <a:alpha val="12000"/>
+              </a:srgbClr>
+            </a:outerShdw>
+          </a:effectLst>
+        </p:spPr>
+      </p:sp>
+      <p:pic>
+        <p:nvPicPr>
+          <p:cNvPr id="3" name="Image 0" descr="preencoded.png">    </p:cNvPr>
+          <p:cNvPicPr>
+            <a:picLocks noChangeAspect="1"/>
+          </p:cNvPicPr>
+          <p:nvPr/>
+        </p:nvPicPr>
+        <p:blipFill>
+          <a:blip r:embed="rId1"/>
+          <a:stretch>
+            <a:fillRect/>
+          </a:stretch>
+        </p:blipFill>
+        <p:spPr>
+          <a:xfrm>
+            <a:off x="594360" y="521208"/>
+            <a:ext cx="256032" cy="256032"/>
+          </a:xfrm>
+          <a:prstGeom prst="rect">
+            <a:avLst/>
+          </a:prstGeom>
+        </p:spPr>
+      </p:pic>
+      <p:sp>
+        <p:nvSpPr>
+          <p:cNvPr id="4" name="Text 1"/>
+          <p:cNvSpPr/>
+          <p:nvPr/>
+        </p:nvSpPr>
+        <p:spPr>
+          <a:xfrm>
+            <a:off x="1143000" y="329184"/>
+            <a:ext cx="7498080" cy="603504"/>
+          </a:xfrm>
+          <a:prstGeom prst="rect">
+            <a:avLst/>
+          </a:prstGeom>
+          <a:noFill/>
+          <a:ln/>
+        </p:spPr>
+        <p:txBody>
+          <a:bodyPr wrap="square" lIns="0" tIns="0" rIns="0" bIns="0" rtlCol="0" anchor="ctr"/>
+          <a:lstStyle/>
+          <a:p>
+            <a:pPr indent="0" marL="0">
+              <a:buNone/>
+            </a:pPr>
+            <a:r>
+              <a:rPr lang="en-US" sz="2600" b="1" dirty="0">
+                <a:solidFill>
+                  <a:srgbClr val="1F2937"/>
+                </a:solidFill>
+                <a:latin typeface="Arial" pitchFamily="34" charset="0"/>
+                <a:ea typeface="Arial" pitchFamily="34" charset="-122"/>
+                <a:cs typeface="Arial" pitchFamily="34" charset="-120"/>
+              </a:rPr>
+              <a:t>Deliverable</a:t>
+            </a:r>
+            <a:endParaRPr lang="en-US" sz="2600" dirty="0"/>
+          </a:p>
+        </p:txBody>
+      </p:sp>
+      <p:sp>
+        <p:nvSpPr>
+          <p:cNvPr id="5" name="Shape 2"/>
+          <p:cNvSpPr/>
+          <p:nvPr/>
+        </p:nvSpPr>
+        <p:spPr>
+          <a:xfrm>
+            <a:off x="457200" y="1325880"/>
+            <a:ext cx="8229600" cy="1719072"/>
+          </a:xfrm>
+          <a:prstGeom prst="roundRect">
+            <a:avLst>
+              <a:gd name="adj" fmla="val 4255"/>
+            </a:avLst>
+          </a:prstGeom>
+          <a:solidFill>
+            <a:srgbClr val="F1F5F9"/>
+          </a:solidFill>
+          <a:ln/>
+          <a:effectLst>
+            <a:outerShdw sx="100000" sy="100000" kx="0" ky="0" algn="bl" rotWithShape="0" blurRad="76200" dist="25400" dir="5400000">
+              <a:srgbClr val="000000">
+                <a:alpha val="12000"/>
+              </a:srgbClr>
+            </a:outerShdw>
+          </a:effectLst>
+        </p:spPr>
+      </p:sp>
+      <p:sp>
+        <p:nvSpPr>
+          <p:cNvPr id="6" name="Text 3"/>
+          <p:cNvSpPr/>
+          <p:nvPr/>
+        </p:nvSpPr>
+        <p:spPr>
+          <a:xfrm>
+            <a:off x="731520" y="1435608"/>
+            <a:ext cx="7680960" cy="1499616"/>
+          </a:xfrm>
+          <a:prstGeom prst="rect">
+            <a:avLst/>
+          </a:prstGeom>
+          <a:noFill/>
+          <a:ln/>
+        </p:spPr>
+        <p:txBody>
+          <a:bodyPr wrap="square" lIns="0" tIns="0" rIns="0" bIns="0" rtlCol="0" anchor="t">
+            <a:normAutofit/>
+          </a:bodyPr>
+          <a:lstStyle/>
+          <a:p>
+            <a:pPr marL="342900" indent="-342900">
+              <a:spcAft>
+                <a:spcPts val="600"/>
+              </a:spcAft>
+              <a:buSzPct val="100000"/>
+              <a:buChar char="•"/>
+            </a:pPr>
+            <a:r>
+              <a:rPr lang="en-US" sz="1400" dirty="0">
+                <a:solidFill>
+                  <a:srgbClr val="1F2937"/>
+                </a:solidFill>
+                <a:latin typeface="Calibri" pitchFamily="34" charset="0"/>
+                <a:ea typeface="Calibri" pitchFamily="34" charset="-122"/>
+                <a:cs typeface="Calibri" pitchFamily="34" charset="-120"/>
+              </a:rPr>
+              <a:t>Each XSS type with payload + context</a:t>
+            </a:r>
+            <a:endParaRPr lang="en-US" sz="1400" dirty="0"/>
+          </a:p>
+          <a:p>
+            <a:pPr marL="342900" indent="-342900">
+              <a:spcAft>
+                <a:spcPts val="600"/>
+              </a:spcAft>
+              <a:buSzPct val="100000"/>
+              <a:buChar char="•"/>
+            </a:pPr>
+            <a:r>
+              <a:rPr lang="en-US" sz="1400" dirty="0">
+                <a:solidFill>
+                  <a:srgbClr val="1F2937"/>
+                </a:solidFill>
+                <a:latin typeface="Calibri" pitchFamily="34" charset="0"/>
+                <a:ea typeface="Calibri" pitchFamily="34" charset="-122"/>
+                <a:cs typeface="Calibri" pitchFamily="34" charset="-120"/>
+              </a:rPr>
+              <a:t>Escaping + CSP that blocks them (show before/after)</a:t>
+            </a:r>
+            <a:endParaRPr lang="en-US" sz="1400" dirty="0"/>
+          </a:p>
+          <a:p>
+            <a:pPr marL="342900" indent="-342900">
+              <a:spcAft>
+                <a:spcPts val="600"/>
+              </a:spcAft>
+              <a:buSzPct val="100000"/>
+              <a:buChar char="•"/>
+            </a:pPr>
+            <a:r>
+              <a:rPr lang="en-US" sz="1400" dirty="0">
+                <a:solidFill>
+                  <a:srgbClr val="1F2937"/>
+                </a:solidFill>
+                <a:latin typeface="Calibri" pitchFamily="34" charset="0"/>
+                <a:ea typeface="Calibri" pitchFamily="34" charset="-122"/>
+                <a:cs typeface="Calibri" pitchFamily="34" charset="-120"/>
+              </a:rPr>
+              <a:t>Short note: why CSRF still succeeds against fixed_app.py despite SameSite=Strict</a:t>
+            </a:r>
+            <a:endParaRPr lang="en-US" sz="1400" dirty="0"/>
+          </a:p>
+          <a:p>
+            <a:pPr marL="342900" indent="-342900">
+              <a:spcAft>
+                <a:spcPts val="600"/>
+              </a:spcAft>
+              <a:buSzPct val="100000"/>
+              <a:buChar char="•"/>
+            </a:pPr>
+            <a:r>
+              <a:rPr lang="en-US" sz="1400" dirty="0">
+                <a:solidFill>
+                  <a:srgbClr val="1F2937"/>
+                </a:solidFill>
+                <a:latin typeface="Calibri" pitchFamily="34" charset="0"/>
+                <a:ea typeface="Calibri" pitchFamily="34" charset="-122"/>
+                <a:cs typeface="Calibri" pitchFamily="34" charset="-120"/>
+              </a:rPr>
+              <a:t>+ Audit the AI / EiPE / Prompt Problem (see worksheet)</a:t>
+            </a:r>
+            <a:endParaRPr lang="en-US" sz="1400" dirty="0"/>
+          </a:p>
+        </p:txBody>
+      </p:sp>
+      <p:sp>
+        <p:nvSpPr>
+          <p:cNvPr id="7" name="Text 4"/>
+          <p:cNvSpPr/>
+          <p:nvPr/>
+        </p:nvSpPr>
+        <p:spPr>
+          <a:xfrm>
+            <a:off x="457200" y="4800600"/>
+            <a:ext cx="6949440" cy="274320"/>
+          </a:xfrm>
+          <a:prstGeom prst="rect">
+            <a:avLst/>
+          </a:prstGeom>
+          <a:noFill/>
+          <a:ln/>
+        </p:spPr>
+        <p:txBody>
+          <a:bodyPr wrap="square" lIns="0" tIns="0" rIns="0" bIns="0" rtlCol="0" anchor="ctr"/>
+          <a:lstStyle/>
+          <a:p>
+            <a:pPr indent="0" marL="0">
+              <a:buNone/>
+            </a:pPr>
+            <a:r>
+              <a:rPr lang="en-US" sz="900" dirty="0">
+                <a:solidFill>
+                  <a:srgbClr val="64748B"/>
+                </a:solidFill>
+                <a:latin typeface="Calibri" pitchFamily="34" charset="0"/>
+                <a:ea typeface="Calibri" pitchFamily="34" charset="-122"/>
+                <a:cs typeface="Calibri" pitchFamily="34" charset="-120"/>
+              </a:rPr>
+              <a:t>Software Security · Week 5</a:t>
+            </a:r>
+            <a:endParaRPr lang="en-US" sz="900" dirty="0"/>
+          </a:p>
+        </p:txBody>
+      </p:sp>
+      <p:pic>
+        <p:nvPicPr>
+          <p:cNvPr id="8" name="Image 1" descr="/Users/pop7/Library/CloudStorage/OneDrive-MonsterConnectCo.,Ltd/Lecture/KOSEN69 - software-security/slides/pptx/assets/logo-small.png">    </p:cNvPr>
+          <p:cNvPicPr>
+            <a:picLocks noChangeAspect="1"/>
+          </p:cNvPicPr>
+          <p:nvPr/>
+        </p:nvPicPr>
+        <p:blipFill>
+          <a:blip r:embed="rId2"/>
+          <a:stretch>
+            <a:fillRect/>
+          </a:stretch>
+        </p:blipFill>
+        <p:spPr>
+          <a:xfrm>
+            <a:off x="7882128" y="4700016"/>
+            <a:ext cx="768096" cy="356616"/>
+          </a:xfrm>
+          <a:prstGeom prst="rect">
+            <a:avLst/>
+          </a:prstGeom>
+        </p:spPr>
+      </p:pic>
+    </p:spTree>
+  </p:cSld>
+  <p:clrMapOvr>
+    <a:masterClrMapping/>
+  </p:clrMapOvr>
+</p:sld>
+</file>
+
+<file path=ppt/slides/slide21.xml><?xml version="1.0" encoding="utf-8"?>
+<p:sld xmlns:a="http://schemas.openxmlformats.org/drawingml/2006/main" xmlns:r="http://schemas.openxmlformats.org/officeDocument/2006/relationships" xmlns:p="http://schemas.openxmlformats.org/presentationml/2006/main">
+  <p:cSld name="Slide 21">
+    <p:bg>
+      <p:bgPr>
+        <a:solidFill>
+          <a:srgbClr val="FFFFFF"/>
+        </a:solidFill>
+      </p:bgPr>
+    </p:bg>
+    <p:spTree>
+      <p:nvGrpSpPr>
+        <p:cNvPr id="1" name=""/>
+        <p:cNvGrpSpPr/>
+        <p:nvPr/>
+      </p:nvGrpSpPr>
+      <p:grpSpPr>
+        <a:xfrm>
+          <a:off x="0" y="0"/>
+          <a:ext cx="0" cy="0"/>
+          <a:chOff x="0" y="0"/>
+          <a:chExt cx="0" cy="0"/>
+        </a:xfrm>
+      </p:grpSpPr>
+      <p:sp>
+        <p:nvSpPr>
+          <p:cNvPr id="2" name="Shape 0"/>
+          <p:cNvSpPr/>
+          <p:nvPr/>
+        </p:nvSpPr>
+        <p:spPr>
+          <a:xfrm>
+            <a:off x="457200" y="384048"/>
+            <a:ext cx="530352" cy="530352"/>
+          </a:xfrm>
+          <a:prstGeom prst="ellipse">
+            <a:avLst/>
+          </a:prstGeom>
+          <a:solidFill>
+            <a:srgbClr val="E35205"/>
+          </a:solidFill>
+          <a:ln/>
+          <a:effectLst>
+            <a:outerShdw sx="100000" sy="100000" kx="0" ky="0" algn="bl" rotWithShape="0" blurRad="76200" dist="25400" dir="5400000">
+              <a:srgbClr val="000000">
+                <a:alpha val="12000"/>
+              </a:srgbClr>
+            </a:outerShdw>
+          </a:effectLst>
+        </p:spPr>
+      </p:sp>
+      <p:pic>
+        <p:nvPicPr>
+          <p:cNvPr id="3" name="Image 0" descr="preencoded.png">    </p:cNvPr>
+          <p:cNvPicPr>
+            <a:picLocks noChangeAspect="1"/>
+          </p:cNvPicPr>
+          <p:nvPr/>
+        </p:nvPicPr>
+        <p:blipFill>
+          <a:blip r:embed="rId1"/>
+          <a:stretch>
+            <a:fillRect/>
+          </a:stretch>
+        </p:blipFill>
+        <p:spPr>
+          <a:xfrm>
+            <a:off x="594360" y="521208"/>
+            <a:ext cx="256032" cy="256032"/>
+          </a:xfrm>
+          <a:prstGeom prst="rect">
+            <a:avLst/>
+          </a:prstGeom>
+        </p:spPr>
+      </p:pic>
+      <p:sp>
+        <p:nvSpPr>
+          <p:cNvPr id="4" name="Text 1"/>
+          <p:cNvSpPr/>
+          <p:nvPr/>
+        </p:nvSpPr>
+        <p:spPr>
+          <a:xfrm>
+            <a:off x="1143000" y="329184"/>
+            <a:ext cx="7498080" cy="603504"/>
+          </a:xfrm>
+          <a:prstGeom prst="rect">
+            <a:avLst/>
+          </a:prstGeom>
+          <a:noFill/>
+          <a:ln/>
+        </p:spPr>
+        <p:txBody>
+          <a:bodyPr wrap="square" lIns="0" tIns="0" rIns="0" bIns="0" rtlCol="0" anchor="ctr"/>
+          <a:lstStyle/>
+          <a:p>
+            <a:pPr indent="0" marL="0">
+              <a:buNone/>
+            </a:pPr>
+            <a:r>
+              <a:rPr lang="en-US" sz="2600" b="1" dirty="0">
+                <a:solidFill>
+                  <a:srgbClr val="1F2937"/>
+                </a:solidFill>
+                <a:latin typeface="Arial" pitchFamily="34" charset="0"/>
+                <a:ea typeface="Arial" pitchFamily="34" charset="-122"/>
+                <a:cs typeface="Arial" pitchFamily="34" charset="-120"/>
+              </a:rPr>
+              <a:t>Key takeaways</a:t>
+            </a:r>
+            <a:endParaRPr lang="en-US" sz="2600" dirty="0"/>
+          </a:p>
+        </p:txBody>
+      </p:sp>
+      <p:sp>
+        <p:nvSpPr>
+          <p:cNvPr id="5" name="Shape 2"/>
+          <p:cNvSpPr/>
+          <p:nvPr/>
+        </p:nvSpPr>
+        <p:spPr>
+          <a:xfrm>
+            <a:off x="457200" y="1325880"/>
+            <a:ext cx="8229600" cy="1408176"/>
+          </a:xfrm>
+          <a:prstGeom prst="roundRect">
+            <a:avLst>
+              <a:gd name="adj" fmla="val 5195"/>
+            </a:avLst>
+          </a:prstGeom>
+          <a:solidFill>
+            <a:srgbClr val="F1F5F9"/>
+          </a:solidFill>
+          <a:ln/>
+          <a:effectLst>
+            <a:outerShdw sx="100000" sy="100000" kx="0" ky="0" algn="bl" rotWithShape="0" blurRad="76200" dist="25400" dir="5400000">
+              <a:srgbClr val="000000">
+                <a:alpha val="12000"/>
+              </a:srgbClr>
+            </a:outerShdw>
+          </a:effectLst>
+        </p:spPr>
+      </p:sp>
+      <p:sp>
+        <p:nvSpPr>
+          <p:cNvPr id="6" name="Text 3"/>
+          <p:cNvSpPr/>
+          <p:nvPr/>
+        </p:nvSpPr>
+        <p:spPr>
+          <a:xfrm>
+            <a:off x="731520" y="1435608"/>
+            <a:ext cx="7680960" cy="1188720"/>
+          </a:xfrm>
+          <a:prstGeom prst="rect">
+            <a:avLst/>
+          </a:prstGeom>
+          <a:noFill/>
+          <a:ln/>
+        </p:spPr>
+        <p:txBody>
+          <a:bodyPr wrap="square" lIns="0" tIns="0" rIns="0" bIns="0" rtlCol="0" anchor="t">
+            <a:normAutofit/>
+          </a:bodyPr>
+          <a:lstStyle/>
+          <a:p>
+            <a:pPr marL="342900" indent="-342900">
+              <a:spcAft>
+                <a:spcPts val="600"/>
+              </a:spcAft>
+              <a:buSzPct val="100000"/>
+              <a:buChar char="•"/>
+            </a:pPr>
+            <a:r>
+              <a:rPr lang="en-US" sz="1400" dirty="0">
+                <a:solidFill>
+                  <a:srgbClr val="1F2937"/>
+                </a:solidFill>
+                <a:latin typeface="Calibri" pitchFamily="34" charset="0"/>
+                <a:ea typeface="Calibri" pitchFamily="34" charset="-122"/>
+                <a:cs typeface="Calibri" pitchFamily="34" charset="-120"/>
+              </a:rPr>
+              <a:t>XSS is injection on the output side — encode for the context</a:t>
+            </a:r>
+            <a:endParaRPr lang="en-US" sz="1400" dirty="0"/>
+          </a:p>
+          <a:p>
+            <a:pPr marL="342900" indent="-342900">
+              <a:spcAft>
+                <a:spcPts val="600"/>
+              </a:spcAft>
+              <a:buSzPct val="100000"/>
+              <a:buChar char="•"/>
+            </a:pPr>
+            <a:r>
+              <a:rPr lang="en-US" sz="1400" dirty="0">
+                <a:solidFill>
+                  <a:srgbClr val="1F2937"/>
+                </a:solidFill>
+                <a:latin typeface="Calibri" pitchFamily="34" charset="0"/>
+                <a:ea typeface="Calibri" pitchFamily="34" charset="-122"/>
+                <a:cs typeface="Calibri" pitchFamily="34" charset="-120"/>
+              </a:rPr>
+              <a:t>CSP is defense-in-depth, not a substitute for encoding</a:t>
+            </a:r>
+            <a:endParaRPr lang="en-US" sz="1400" dirty="0"/>
+          </a:p>
+          <a:p>
+            <a:pPr marL="342900" indent="-342900">
+              <a:spcAft>
+                <a:spcPts val="600"/>
+              </a:spcAft>
+              <a:buSzPct val="100000"/>
+              <a:buChar char="•"/>
+            </a:pPr>
+            <a:r>
+              <a:rPr lang="en-US" sz="1400" dirty="0">
+                <a:solidFill>
+                  <a:srgbClr val="1F2937"/>
+                </a:solidFill>
+                <a:latin typeface="Calibri" pitchFamily="34" charset="0"/>
+                <a:ea typeface="Calibri" pitchFamily="34" charset="-122"/>
+                <a:cs typeface="Calibri" pitchFamily="34" charset="-120"/>
+              </a:rPr>
+              <a:t>SameSite cookies stop the cookie attaching cross-site — they don't stop a request being accepted if the endpoint never checks authorization</a:t>
+            </a:r>
+            <a:endParaRPr lang="en-US" sz="1400" dirty="0"/>
+          </a:p>
+        </p:txBody>
+      </p:sp>
+      <p:sp>
+        <p:nvSpPr>
+          <p:cNvPr id="7" name="Text 4"/>
+          <p:cNvSpPr/>
+          <p:nvPr/>
+        </p:nvSpPr>
+        <p:spPr>
+          <a:xfrm>
+            <a:off x="457200" y="4800600"/>
+            <a:ext cx="6949440" cy="274320"/>
+          </a:xfrm>
+          <a:prstGeom prst="rect">
+            <a:avLst/>
+          </a:prstGeom>
+          <a:noFill/>
+          <a:ln/>
+        </p:spPr>
+        <p:txBody>
+          <a:bodyPr wrap="square" lIns="0" tIns="0" rIns="0" bIns="0" rtlCol="0" anchor="ctr"/>
+          <a:lstStyle/>
+          <a:p>
+            <a:pPr indent="0" marL="0">
+              <a:buNone/>
+            </a:pPr>
+            <a:r>
+              <a:rPr lang="en-US" sz="900" dirty="0">
+                <a:solidFill>
+                  <a:srgbClr val="64748B"/>
+                </a:solidFill>
+                <a:latin typeface="Calibri" pitchFamily="34" charset="0"/>
+                <a:ea typeface="Calibri" pitchFamily="34" charset="-122"/>
+                <a:cs typeface="Calibri" pitchFamily="34" charset="-120"/>
+              </a:rPr>
+              <a:t>Software Security · Week 5</a:t>
+            </a:r>
+            <a:endParaRPr lang="en-US" sz="900" dirty="0"/>
+          </a:p>
+        </p:txBody>
+      </p:sp>
+      <p:pic>
+        <p:nvPicPr>
+          <p:cNvPr id="8" name="Image 1" descr="/Users/pop7/Library/CloudStorage/OneDrive-MonsterConnectCo.,Ltd/Lecture/KOSEN69 - software-security/slides/pptx/assets/logo-small.png">    </p:cNvPr>
+          <p:cNvPicPr>
+            <a:picLocks noChangeAspect="1"/>
+          </p:cNvPicPr>
+          <p:nvPr/>
+        </p:nvPicPr>
+        <p:blipFill>
+          <a:blip r:embed="rId2"/>
+          <a:stretch>
+            <a:fillRect/>
+          </a:stretch>
+        </p:blipFill>
+        <p:spPr>
+          <a:xfrm>
+            <a:off x="7882128" y="4700016"/>
+            <a:ext cx="768096" cy="356616"/>
+          </a:xfrm>
+          <a:prstGeom prst="rect">
+            <a:avLst/>
+          </a:prstGeom>
+        </p:spPr>
+      </p:pic>
+    </p:spTree>
+  </p:cSld>
+  <p:clrMapOvr>
+    <a:masterClrMapping/>
+  </p:clrMapOvr>
+</p:sld>
+</file>
+
+<file path=ppt/slides/slide22.xml><?xml version="1.0" encoding="utf-8"?>
+<p:sld xmlns:a="http://schemas.openxmlformats.org/drawingml/2006/main" xmlns:r="http://schemas.openxmlformats.org/officeDocument/2006/relationships" xmlns:p="http://schemas.openxmlformats.org/presentationml/2006/main">
+  <p:cSld name="Slide 22">
+    <p:bg>
+      <p:bgPr>
+        <a:solidFill>
+          <a:srgbClr val="FFFFFF"/>
+        </a:solidFill>
+      </p:bgPr>
+    </p:bg>
+    <p:spTree>
+      <p:nvGrpSpPr>
+        <p:cNvPr id="1" name=""/>
+        <p:cNvGrpSpPr/>
+        <p:nvPr/>
+      </p:nvGrpSpPr>
+      <p:grpSpPr>
+        <a:xfrm>
+          <a:off x="0" y="0"/>
+          <a:ext cx="0" cy="0"/>
+          <a:chOff x="0" y="0"/>
+          <a:chExt cx="0" cy="0"/>
+        </a:xfrm>
+      </p:grpSpPr>
+      <p:sp>
+        <p:nvSpPr>
+          <p:cNvPr id="2" name="Text 0"/>
+          <p:cNvSpPr/>
+          <p:nvPr/>
+        </p:nvSpPr>
+        <p:spPr>
+          <a:xfrm>
+            <a:off x="640080" y="1737360"/>
+            <a:ext cx="7863840" cy="1097280"/>
+          </a:xfrm>
+          <a:prstGeom prst="rect">
+            <a:avLst/>
+          </a:prstGeom>
+          <a:noFill/>
+          <a:ln/>
+        </p:spPr>
+        <p:txBody>
+          <a:bodyPr wrap="square" lIns="0" tIns="0" rIns="0" bIns="0" rtlCol="0" anchor="ctr"/>
+          <a:lstStyle/>
+          <a:p>
+            <a:pPr indent="0" marL="0">
+              <a:buNone/>
+            </a:pPr>
+            <a:r>
+              <a:rPr lang="en-US" sz="4600" b="1" dirty="0">
+                <a:solidFill>
+                  <a:srgbClr val="1F2937"/>
+                </a:solidFill>
+                <a:latin typeface="Arial" pitchFamily="34" charset="0"/>
+                <a:ea typeface="Arial" pitchFamily="34" charset="-122"/>
+                <a:cs typeface="Arial" pitchFamily="34" charset="-120"/>
+              </a:rPr>
+              <a:t>Questions?</a:t>
+            </a:r>
+            <a:endParaRPr lang="en-US" sz="4600" dirty="0"/>
+          </a:p>
+        </p:txBody>
+      </p:sp>
+      <p:sp>
+        <p:nvSpPr>
+          <p:cNvPr id="3" name="Text 1"/>
+          <p:cNvSpPr/>
+          <p:nvPr/>
+        </p:nvSpPr>
+        <p:spPr>
+          <a:xfrm>
+            <a:off x="658368" y="2834640"/>
+            <a:ext cx="7863840" cy="731520"/>
+          </a:xfrm>
+          <a:prstGeom prst="rect">
+            <a:avLst/>
+          </a:prstGeom>
+          <a:noFill/>
+          <a:ln/>
+        </p:spPr>
+        <p:txBody>
+          <a:bodyPr wrap="square" lIns="0" tIns="0" rIns="0" bIns="0" rtlCol="0" anchor="ctr"/>
+          <a:lstStyle/>
+          <a:p>
+            <a:pPr indent="0" marL="0">
+              <a:buNone/>
+            </a:pPr>
+            <a:r>
+              <a:rPr lang="en-US" sz="1800" dirty="0">
+                <a:solidFill>
+                  <a:srgbClr val="E35205"/>
+                </a:solidFill>
+                <a:latin typeface="Calibri" pitchFamily="34" charset="0"/>
+                <a:ea typeface="Calibri" pitchFamily="34" charset="-122"/>
+                <a:cs typeface="Calibri" pitchFamily="34" charset="-120"/>
+              </a:rPr>
+              <a:t>Next week: Authentication, sessions &amp; access control</a:t>
+            </a:r>
+            <a:endParaRPr lang="en-US" sz="1800" dirty="0"/>
+          </a:p>
+        </p:txBody>
+      </p:sp>
+      <p:pic>
+        <p:nvPicPr>
+          <p:cNvPr id="4" name="Image 0" descr="/Users/pop7/Library/CloudStorage/OneDrive-MonsterConnectCo.,Ltd/Lecture/KOSEN69 - software-security/slides/pptx/assets/logo-small.png">    </p:cNvPr>
+          <p:cNvPicPr>
+            <a:picLocks noChangeAspect="1"/>
+          </p:cNvPicPr>
+          <p:nvPr/>
+        </p:nvPicPr>
+        <p:blipFill>
+          <a:blip r:embed="rId1"/>
           <a:stretch>
             <a:fillRect/>
           </a:stretch>
@@ -8576,7 +9629,7 @@
                 <a:ea typeface="Arial" pitchFamily="34" charset="-122"/>
                 <a:cs typeface="Arial" pitchFamily="34" charset="-120"/>
               </a:rPr>
-              <a:t>CSRF — riding the user's session</a:t>
+              <a:t>The fix: encode on output — data renders as text</a:t>
             </a:r>
             <a:endParaRPr lang="en-US" sz="2600" dirty="0"/>
           </a:p>
@@ -8591,11 +9644,153 @@
         <p:spPr>
           <a:xfrm>
             <a:off x="457200" y="1325880"/>
-            <a:ext cx="8229600" cy="1810512"/>
+            <a:ext cx="8229600" cy="1591056"/>
           </a:xfrm>
           <a:prstGeom prst="roundRect">
             <a:avLst>
-              <a:gd name="adj" fmla="val 4040"/>
+              <a:gd name="adj" fmla="val 3448"/>
+            </a:avLst>
+          </a:prstGeom>
+          <a:solidFill>
+            <a:srgbClr val="0A1020"/>
+          </a:solidFill>
+          <a:ln w="12700">
+            <a:solidFill>
+              <a:srgbClr val="E8EDF3"/>
+            </a:solidFill>
+            <a:prstDash val="solid"/>
+          </a:ln>
+        </p:spPr>
+      </p:sp>
+      <p:sp>
+        <p:nvSpPr>
+          <p:cNvPr id="6" name="Text 3"/>
+          <p:cNvSpPr/>
+          <p:nvPr/>
+        </p:nvSpPr>
+        <p:spPr>
+          <a:xfrm>
+            <a:off x="640080" y="1399032"/>
+            <a:ext cx="7863840" cy="1444752"/>
+          </a:xfrm>
+          <a:prstGeom prst="rect">
+            <a:avLst/>
+          </a:prstGeom>
+          <a:noFill/>
+          <a:ln/>
+        </p:spPr>
+        <p:txBody>
+          <a:bodyPr wrap="square" lIns="0" tIns="0" rIns="0" bIns="0" rtlCol="0" anchor="t">
+            <a:normAutofit/>
+          </a:bodyPr>
+          <a:lstStyle/>
+          <a:p>
+            <a:pPr indent="0" marL="0">
+              <a:buNone/>
+            </a:pPr>
+            <a:r>
+              <a:rPr lang="en-US" sz="1150" dirty="0">
+                <a:solidFill>
+                  <a:srgbClr val="9FE7D6"/>
+                </a:solidFill>
+                <a:latin typeface="Courier New" pitchFamily="34" charset="0"/>
+                <a:ea typeface="Courier New" pitchFamily="34" charset="-122"/>
+                <a:cs typeface="Courier New" pitchFamily="34" charset="-120"/>
+              </a:rPr>
+              <a:t># vulnerable: raw value concatenated into HTML -&gt; &lt;script&gt; is parsed as a tag</a:t>
+            </a:r>
+            <a:endParaRPr lang="en-US" sz="1150" dirty="0"/>
+          </a:p>
+          <a:p>
+            <a:pPr indent="0" marL="0">
+              <a:buNone/>
+            </a:pPr>
+            <a:r>
+              <a:rPr lang="en-US" sz="1150" dirty="0">
+                <a:solidFill>
+                  <a:srgbClr val="9FE7D6"/>
+                </a:solidFill>
+                <a:latin typeface="Courier New" pitchFamily="34" charset="0"/>
+                <a:ea typeface="Courier New" pitchFamily="34" charset="-122"/>
+                <a:cs typeface="Courier New" pitchFamily="34" charset="-120"/>
+              </a:rPr>
+              <a:t>html = "&lt;h1&gt;Hello, " + name + "!&lt;/h1&gt;"</a:t>
+            </a:r>
+            <a:endParaRPr lang="en-US" sz="1150" dirty="0"/>
+          </a:p>
+          <a:p>
+            <a:pPr indent="0" marL="0">
+              <a:buNone/>
+            </a:pPr>
+            <a:endParaRPr lang="en-US" sz="1150" dirty="0"/>
+          </a:p>
+          <a:p>
+            <a:pPr indent="0" marL="0">
+              <a:buNone/>
+            </a:pPr>
+            <a:r>
+              <a:rPr lang="en-US" sz="1150" dirty="0">
+                <a:solidFill>
+                  <a:srgbClr val="9FE7D6"/>
+                </a:solidFill>
+                <a:latin typeface="Courier New" pitchFamily="34" charset="0"/>
+                <a:ea typeface="Courier New" pitchFamily="34" charset="-122"/>
+                <a:cs typeface="Courier New" pitchFamily="34" charset="-120"/>
+              </a:rPr>
+              <a:t># fixed: escape() for the HTML context -&gt; &lt; becomes &amp;lt;, shown as text</a:t>
+            </a:r>
+            <a:endParaRPr lang="en-US" sz="1150" dirty="0"/>
+          </a:p>
+          <a:p>
+            <a:pPr indent="0" marL="0">
+              <a:buNone/>
+            </a:pPr>
+            <a:r>
+              <a:rPr lang="en-US" sz="1150" dirty="0">
+                <a:solidFill>
+                  <a:srgbClr val="9FE7D6"/>
+                </a:solidFill>
+                <a:latin typeface="Courier New" pitchFamily="34" charset="0"/>
+                <a:ea typeface="Courier New" pitchFamily="34" charset="-122"/>
+                <a:cs typeface="Courier New" pitchFamily="34" charset="-120"/>
+              </a:rPr>
+              <a:t>html = "&lt;h1&gt;Hello, " + str(escape(name)) + "!&lt;/h1&gt;"</a:t>
+            </a:r>
+            <a:endParaRPr lang="en-US" sz="1150" dirty="0"/>
+          </a:p>
+          <a:p>
+            <a:pPr indent="0" marL="0">
+              <a:buNone/>
+            </a:pPr>
+            <a:r>
+              <a:rPr lang="en-US" sz="1150" dirty="0">
+                <a:solidFill>
+                  <a:srgbClr val="9FE7D6"/>
+                </a:solidFill>
+                <a:latin typeface="Courier New" pitchFamily="34" charset="0"/>
+                <a:ea typeface="Courier New" pitchFamily="34" charset="-122"/>
+                <a:cs typeface="Courier New" pitchFamily="34" charset="-120"/>
+              </a:rPr>
+              <a:t># stored comments: Jinja autoescaping renders {{ c }} as text, not markup</a:t>
+            </a:r>
+            <a:endParaRPr lang="en-US" sz="1150" dirty="0"/>
+          </a:p>
+        </p:txBody>
+      </p:sp>
+      <p:sp>
+        <p:nvSpPr>
+          <p:cNvPr id="7" name="Shape 4"/>
+          <p:cNvSpPr/>
+          <p:nvPr/>
+        </p:nvSpPr>
+        <p:spPr>
+          <a:xfrm>
+            <a:off x="457200" y="3081528"/>
+            <a:ext cx="8229600" cy="1097280"/>
+          </a:xfrm>
+          <a:prstGeom prst="roundRect">
+            <a:avLst>
+              <a:gd name="adj" fmla="val 6667"/>
             </a:avLst>
           </a:prstGeom>
           <a:solidFill>
@@ -8613,14 +9808,14 @@
       </p:sp>
       <p:sp>
         <p:nvSpPr>
-          <p:cNvPr id="6" name="Text 3"/>
-          <p:cNvSpPr/>
-          <p:nvPr/>
-        </p:nvSpPr>
-        <p:spPr>
-          <a:xfrm>
-            <a:off x="731520" y="1435608"/>
-            <a:ext cx="7680960" cy="1591056"/>
+          <p:cNvPr id="8" name="Text 5"/>
+          <p:cNvSpPr/>
+          <p:nvPr/>
+        </p:nvSpPr>
+        <p:spPr>
+          <a:xfrm>
+            <a:off x="731520" y="3191256"/>
+            <a:ext cx="7680960" cy="877824"/>
           </a:xfrm>
           <a:prstGeom prst="rect">
             <a:avLst/>
@@ -8650,7 +9845,7 @@
                 <a:ea typeface="Calibri" pitchFamily="34" charset="-122"/>
                 <a:cs typeface="Calibri" pitchFamily="34" charset="-120"/>
               </a:rPr>
-              <a:t>Browser auto-sends cookies → attacker forges a state-changing request</a:t>
+              <a:t>The bug is on output — storing &lt;script&gt; is fine; rendering it unescaped is not</a:t>
             </a:r>
             <a:endParaRPr lang="en-US" sz="1400" dirty="0"/>
           </a:p>
@@ -8671,66 +9866,45 @@
                 <a:ea typeface="Calibri" pitchFamily="34" charset="-122"/>
                 <a:cs typeface="Calibri" pitchFamily="34" charset="-120"/>
               </a:rPr>
-              <a:t>Real defenses: anti-CSRF tokens, checking Origin/Referer, and the endpoint actually checking who's asking</a:t>
+              <a:t>escape() turns &lt; into &amp;lt; — the parser reads an entity (text), never a tag-start</a:t>
             </a:r>
             <a:endParaRPr lang="en-US" sz="1400" dirty="0"/>
           </a:p>
-          <a:p>
-            <a:pPr marL="342900" indent="-342900">
-              <a:spcAft>
-                <a:spcPts val="600"/>
-              </a:spcAft>
-              <a:buSzPct val="100000"/>
-              <a:buChar char="•"/>
-            </a:pPr>
-            <a:r>
-              <a:rPr lang="en-US" sz="1400" dirty="0">
-                <a:solidFill>
-                  <a:srgbClr val="1F2937"/>
+        </p:txBody>
+      </p:sp>
+      <p:sp>
+        <p:nvSpPr>
+          <p:cNvPr id="9" name="Text 6"/>
+          <p:cNvSpPr/>
+          <p:nvPr/>
+        </p:nvSpPr>
+        <p:spPr>
+          <a:xfrm>
+            <a:off x="457200" y="4800600"/>
+            <a:ext cx="6949440" cy="274320"/>
+          </a:xfrm>
+          <a:prstGeom prst="rect">
+            <a:avLst/>
+          </a:prstGeom>
+          <a:noFill/>
+          <a:ln/>
+        </p:spPr>
+        <p:txBody>
+          <a:bodyPr wrap="square" lIns="0" tIns="0" rIns="0" bIns="0" rtlCol="0" anchor="ctr"/>
+          <a:lstStyle/>
+          <a:p>
+            <a:pPr indent="0" marL="0">
+              <a:buNone/>
+            </a:pPr>
+            <a:r>
+              <a:rPr lang="en-US" sz="900" dirty="0">
+                <a:solidFill>
+                  <a:srgbClr val="64748B"/>
                 </a:solidFill>
                 <a:latin typeface="Calibri" pitchFamily="34" charset="0"/>
                 <a:ea typeface="Calibri" pitchFamily="34" charset="-122"/>
                 <a:cs typeface="Calibri" pitchFamily="34" charset="-120"/>
               </a:rPr>
-              <a:t>SameSite=Strict alone stops the cookie from attaching cross-site — it does not stop a request from being accepted if the endpoint never checks authorization in the first place (today's lab proves this)</a:t>
-            </a:r>
-            <a:endParaRPr lang="en-US" sz="1400" dirty="0"/>
-          </a:p>
-        </p:txBody>
-      </p:sp>
-      <p:sp>
-        <p:nvSpPr>
-          <p:cNvPr id="7" name="Text 4"/>
-          <p:cNvSpPr/>
-          <p:nvPr/>
-        </p:nvSpPr>
-        <p:spPr>
-          <a:xfrm>
-            <a:off x="457200" y="4800600"/>
-            <a:ext cx="6949440" cy="274320"/>
-          </a:xfrm>
-          <a:prstGeom prst="rect">
-            <a:avLst/>
-          </a:prstGeom>
-          <a:noFill/>
-          <a:ln/>
-        </p:spPr>
-        <p:txBody>
-          <a:bodyPr wrap="square" lIns="0" tIns="0" rIns="0" bIns="0" rtlCol="0" anchor="ctr"/>
-          <a:lstStyle/>
-          <a:p>
-            <a:pPr indent="0" marL="0">
-              <a:buNone/>
-            </a:pPr>
-            <a:r>
-              <a:rPr lang="en-US" sz="900" dirty="0">
-                <a:solidFill>
-                  <a:srgbClr val="64748B"/>
-                </a:solidFill>
-                <a:latin typeface="Calibri" pitchFamily="34" charset="0"/>
-                <a:ea typeface="Calibri" pitchFamily="34" charset="-122"/>
-                <a:cs typeface="Calibri" pitchFamily="34" charset="-120"/>
-              </a:rPr>
               <a:t>Software Security · Week 5</a:t>
             </a:r>
             <a:endParaRPr lang="en-US" sz="900" dirty="0"/>
@@ -8739,7 +9913,7 @@
       </p:sp>
       <p:pic>
         <p:nvPicPr>
-          <p:cNvPr id="8" name="Image 1" descr="/Users/pop7/Library/CloudStorage/OneDrive-MonsterConnectCo.,Ltd/Lecture/KOSEN69 - software-security/slides/pptx/assets/logo-small.png">    </p:cNvPr>
+          <p:cNvPr id="10" name="Image 1" descr="/Users/pop7/Library/CloudStorage/OneDrive-MonsterConnectCo.,Ltd/Lecture/KOSEN69 - software-security/slides/pptx/assets/logo-small.png">    </p:cNvPr>
           <p:cNvPicPr>
             <a:picLocks noChangeAspect="1"/>
           </p:cNvPicPr>
